--- a/lecons/USA/Population Geography/11_USA_POP_L08_Historical_Evolution_of_World_Population.pptx
+++ b/lecons/USA/Population Geography/11_USA_POP_L08_Historical_Evolution_of_World_Population.pptx
@@ -69,11 +69,9 @@
     <p:sldId id="317" r:id="rId63"/>
     <p:sldId id="318" r:id="rId64"/>
     <p:sldId id="319" r:id="rId65"/>
-    <p:sldId id="320" r:id="rId66"/>
-    <p:sldId id="321" r:id="rId67"/>
   </p:sldIdLst>
   <p:notesMasterIdLst>
-    <p:notesMasterId r:id="rId68"/>
+    <p:notesMasterId r:id="rId66"/>
   </p:notesMasterIdLst>
   <p:sldSz cx="12192000" cy="6858000"/>
   <p:notesSz cx="6858000" cy="12192000"/>
@@ -3295,7 +3293,7 @@
           <a:p>
             <a:r>
               <a:rPr lang="en-US" dirty="0"/>
-              <a:t>Let us copy Before 1750 and the Industrial Revolution. The growth of the world population before 1900 is presented as follows. Copy the point on Slow growth before 1750 on the left, then draw the diagram on the right: the J-curve. Give it a title and label it clearly.</a:t>
+              <a:t>Let us copy Up to the Industrial Revolution. The world population grew as follows up to and during the Industrial Revolution. Copy the point on Slow growth before 1750 on the left, then draw the diagram on the right: the growth of world population. Give it a title and label it clearly.</a:t>
             </a:r>
             <a:endParaRPr lang="en-US" dirty="0"/>
           </a:p>
@@ -3383,7 +3381,7 @@
           <a:p>
             <a:r>
               <a:rPr lang="en-US" dirty="0"/>
-              <a:t>We continue with Before 1750 and the Industrial Revolution. On this slide we have Small population. Write each point on a new line, with the key term first, and explain it in your own words when we revise.</a:t>
+              <a:t>We continue with Up to the Industrial Revolution. Copy the point on A small population: write the key term first, then its explanation.</a:t>
             </a:r>
             <a:endParaRPr lang="en-US" dirty="0"/>
           </a:p>
@@ -3647,7 +3645,7 @@
           <a:p>
             <a:r>
               <a:rPr lang="en-US" dirty="0"/>
-              <a:t>We continue with Before 1750 and the Industrial Revolution. On this slide we have Result. Write each point on a new line, with the key term first, and explain it in your own words when we revise.</a:t>
+              <a:t>Let us copy After the Industrial Revolution to the Present. The world population has grown as follows since the Industrial Revolution. Copy the point on The population explosion: write the key term first, then its explanation.</a:t>
             </a:r>
             <a:endParaRPr lang="en-US" dirty="0"/>
           </a:p>
@@ -3735,7 +3733,7 @@
           <a:p>
             <a:r>
               <a:rPr lang="en-US" dirty="0"/>
-              <a:t>Let us copy The Population Explosion since 1950. The population explosion since 1950 is presented as follows. On this slide we have Doubling. Write each point on a new line, with the key term first, and explain it in your own words when we revise. When you finish, we go to the next slide.</a:t>
+              <a:t>Copy the point on Milestones on the left, then draw the diagram on the right: the milestones of world population. Give it a title and label it clearly.</a:t>
             </a:r>
             <a:endParaRPr lang="en-US" dirty="0"/>
           </a:p>
@@ -3823,7 +3821,7 @@
           <a:p>
             <a:r>
               <a:rPr lang="en-US" dirty="0"/>
-              <a:t>We continue with The Population Explosion since 1950. On this slide we have Spread to developing countries and Milestones. Write each point on a new line, with the key term first, and explain it in your own words when we revise. When you finish, we go to the next slide.</a:t>
+              <a:t>We continue with After the Industrial Revolution to the Present. Copy the point on An increasing rate of growth: write the key term first, then its explanation.</a:t>
             </a:r>
             <a:endParaRPr lang="en-US" dirty="0"/>
           </a:p>
@@ -3911,7 +3909,7 @@
           <a:p>
             <a:r>
               <a:rPr lang="en-US" dirty="0"/>
-              <a:t>We continue with The Population Explosion since 1950. Copy this carefully.</a:t>
+              <a:t>We continue with After the Industrial Revolution to the Present. Copy the point on Today: write the key term first, then its explanation.</a:t>
             </a:r>
             <a:endParaRPr lang="en-US" dirty="0"/>
           </a:p>
@@ -3999,7 +3997,7 @@
           <a:p>
             <a:r>
               <a:rPr lang="en-US" dirty="0"/>
-              <a:t>Copy the point on Faster and faster on the left, then draw the diagram on the right: the billions of people. Give it a title and label it clearly.</a:t>
+              <a:t>Let us copy Regional Trends of Population Change. Population changes at different rates in the following groups of countries. Copy the point on Slow change in MEDCs on the left, then draw the diagram on the right: mEDCs and LEDCs. Give it a title and label it clearly.</a:t>
             </a:r>
             <a:endParaRPr lang="en-US" dirty="0"/>
           </a:p>
@@ -4087,7 +4085,7 @@
           <a:p>
             <a:r>
               <a:rPr lang="en-US" dirty="0"/>
-              <a:t>We continue with The Population Explosion since 1950. On this slide we have Today. Write each point on a new line, with the key term first, and explain it in your own words when we revise.</a:t>
+              <a:t>We continue with Regional Trends of Population Change. Copy the point on Why MEDCs grow slowly: write the key term first, then its explanation.</a:t>
             </a:r>
             <a:endParaRPr lang="en-US" dirty="0"/>
           </a:p>
@@ -4175,7 +4173,7 @@
           <a:p>
             <a:r>
               <a:rPr lang="en-US" dirty="0"/>
-              <a:t>Let us copy Regional Trends: MEDCs and LEDCs. The population trends of MEDCs and LEDCs are the following. Copy the point on MEDCs on the left, then draw the diagram on the right: mEDCs and LEDCs. Give it a title and label it clearly.</a:t>
+              <a:t>Copy the point on Fast change in LEDCs on the left, then draw the diagram on the right: regional growth. Give it a title and label it clearly.</a:t>
             </a:r>
             <a:endParaRPr lang="en-US" dirty="0"/>
           </a:p>
@@ -4263,7 +4261,7 @@
           <a:p>
             <a:r>
               <a:rPr lang="en-US" dirty="0"/>
-              <a:t>We continue with Regional Trends: MEDCs and LEDCs. On this slide we have Why MEDCs grow slowly. Write each point on a new line, with the key term first, and explain it in your own words when we revise.</a:t>
+              <a:t>We continue with Regional Trends of Population Change. Copy the point on Why LEDCs grow fast: write the key term first, then its explanation.</a:t>
             </a:r>
             <a:endParaRPr lang="en-US" dirty="0"/>
           </a:p>
@@ -4351,7 +4349,7 @@
           <a:p>
             <a:r>
               <a:rPr lang="en-US" dirty="0"/>
-              <a:t>Copy the point on LEDCs on the left, then draw the diagram on the right: growth of LEDCs and MEDCs. Give it a title and label it clearly.</a:t>
+              <a:t>Let us copy Reasons for the Differences in Rates of Change. The rates of change differ between parts of the world for the following reasons. Copy the point on Economic development: write the key term first, then its explanation.</a:t>
             </a:r>
             <a:endParaRPr lang="en-US" dirty="0"/>
           </a:p>
@@ -4527,7 +4525,7 @@
           <a:p>
             <a:r>
               <a:rPr lang="en-US" dirty="0"/>
-              <a:t>We continue with Regional Trends: MEDCs and LEDCs. On this slide we have Why LEDCs grow fast. Write each point on a new line, with the key term first, and explain it in your own words when we revise.</a:t>
+              <a:t>We continue with Reasons for the Differences in Rates of Change. Copy the point on Social and cultural norms: write the key term first, then its explanation.</a:t>
             </a:r>
             <a:endParaRPr lang="en-US" dirty="0"/>
           </a:p>
@@ -4615,7 +4613,7 @@
           <a:p>
             <a:r>
               <a:rPr lang="en-US" dirty="0"/>
-              <a:t>Let us copy Factors of Regional Differences. The factors of regional differences in growth are the following. On this slide we have Economic development. Write each point on a new line, with the key term first, and explain it in your own words when we revise. When you finish, we go to the next slide.</a:t>
+              <a:t>Copy the point on Education of women on the left, then draw the diagram on the right: girls at school. Give it a title and label it clearly.</a:t>
             </a:r>
             <a:endParaRPr lang="en-US" dirty="0"/>
           </a:p>
@@ -4703,7 +4701,7 @@
           <a:p>
             <a:r>
               <a:rPr lang="en-US" dirty="0"/>
-              <a:t>We continue with Factors of Regional Differences. On this slide we have Social and cultural norms. Write each point on a new line, with the key term first, and explain it in your own words when we revise.</a:t>
+              <a:t>We continue with Reasons for the Differences in Rates of Change. Copy the point on Government policies: write the key term first, then its explanation.</a:t>
             </a:r>
             <a:endParaRPr lang="en-US" dirty="0"/>
           </a:p>
@@ -4791,7 +4789,7 @@
           <a:p>
             <a:r>
               <a:rPr lang="en-US" dirty="0"/>
-              <a:t>Copy the point on Education of women on the left, then draw the diagram on the right: girls at school. Give it a title and label it clearly.</a:t>
+              <a:t>Now let us check what you have understood. Question 1: Why did the world population grow very slowly before 1750? Answer in your exercise book.</a:t>
             </a:r>
             <a:endParaRPr lang="en-US" dirty="0"/>
           </a:p>
@@ -4879,7 +4877,7 @@
           <a:p>
             <a:r>
               <a:rPr lang="en-US" dirty="0"/>
-              <a:t>We continue with Factors of Regional Differences. On this slide we have Government policies. Write each point on a new line, with the key term first, and explain it in your own words when we revise.</a:t>
+              <a:t>The expected answer is: high birth rates were cancelled by high death rates from famine, war and disease. If you got it right, well done.</a:t>
             </a:r>
             <a:endParaRPr lang="en-US" dirty="0"/>
           </a:p>
@@ -4967,7 +4965,7 @@
           <a:p>
             <a:r>
               <a:rPr lang="en-US" dirty="0"/>
-              <a:t>Now let us check what you have understood. Question 1: Why did the world population grow very slowly before 1750? Answer in your exercise book.</a:t>
+              <a:t>Now let us check what you have understood. Question 2: Give two reasons why LEDCs grow faster than MEDCs. Answer in your exercise book.</a:t>
             </a:r>
             <a:endParaRPr lang="en-US" dirty="0"/>
           </a:p>
@@ -5055,7 +5053,7 @@
           <a:p>
             <a:r>
               <a:rPr lang="en-US" dirty="0"/>
-              <a:t>The expected answer is: high birth rates were cancelled by high death rates from famine, war and disease. If you got it right, well done.</a:t>
+              <a:t>The expected answer is: large families are valued, death rates have fallen, few women are educated and family planning is limited (any two). If you got it right, well done.</a:t>
             </a:r>
             <a:endParaRPr lang="en-US" dirty="0"/>
           </a:p>
@@ -5143,7 +5141,7 @@
           <a:p>
             <a:r>
               <a:rPr lang="en-US" dirty="0"/>
-              <a:t>Now let us check what you have understood. Question 2: Give two reasons why LEDCs grow faster than MEDCs. Answer in your exercise book.</a:t>
+              <a:t>For those who need more practice, fill in the blanks in your exercise book. The answers are: number 1, J (J-curve); number 2, 2022; number 3, women.</a:t>
             </a:r>
             <a:endParaRPr lang="en-US" dirty="0"/>
           </a:p>
@@ -5231,7 +5229,7 @@
           <a:p>
             <a:r>
               <a:rPr lang="en-US" dirty="0"/>
-              <a:t>The expected answer is: large families are valued, death rates have fallen, few women are educated and family planning is limited (any two). If you got it right, well done.</a:t>
+              <a:t>For your homework: Write the formula of population change. We shall correct it at the beginning of our next lesson.</a:t>
             </a:r>
             <a:endParaRPr lang="en-US" dirty="0"/>
           </a:p>
@@ -5319,7 +5317,7 @@
           <a:p>
             <a:r>
               <a:rPr lang="en-US" dirty="0"/>
-              <a:t>For those who need more practice, fill in the blanks in your exercise book. The answers are: number 1, J (J-curve); number 2, 2022; number 3, women.</a:t>
+              <a:t>Our next lesson will be on Lesson 9: Population Growth and its Determinants. Thank you for your attention, and see you next time.</a:t>
             </a:r>
             <a:endParaRPr lang="en-US" dirty="0"/>
           </a:p>
@@ -5495,7 +5493,7 @@
           <a:p>
             <a:r>
               <a:rPr lang="en-US" dirty="0"/>
-              <a:t>For your homework: Write the formula of population change. We shall correct it at the beginning of our next lesson.</a:t>
+              <a:t>Let us play the bilingual game. I say a word in English, and you give me the French word. Then we do the reverse.</a:t>
             </a:r>
             <a:endParaRPr lang="en-US" dirty="0"/>
           </a:p>
@@ -5583,7 +5581,7 @@
           <a:p>
             <a:r>
               <a:rPr lang="en-US" dirty="0"/>
-              <a:t>Our next lesson will be on Lesson 9: Population Growth and its Determinants. Thank you for your attention, and see you next time.</a:t>
+              <a:t>I record this information in the official logbook of the class after the lesson.</a:t>
             </a:r>
             <a:endParaRPr lang="en-US" dirty="0"/>
           </a:p>
@@ -5671,7 +5669,7 @@
           <a:p>
             <a:r>
               <a:rPr lang="en-US" dirty="0"/>
-              <a:t>Let us play the bilingual game. I say a word in English, and you give me the French word. Then we do the reverse.</a:t>
+              <a:t>I complete the second page of the logbook: the matter taught, the evaluation, the homework and the attendance.</a:t>
             </a:r>
             <a:endParaRPr lang="en-US" dirty="0"/>
           </a:p>
@@ -5759,7 +5757,7 @@
           <a:p>
             <a:r>
               <a:rPr lang="en-US" dirty="0"/>
-              <a:t>I record this information in the official logbook of the class after the lesson.</a:t>
+              <a:t>This slide is for me, the teacher: it gives the timing of the lesson and what to do if the projector is not available.</a:t>
             </a:r>
             <a:endParaRPr lang="en-US" dirty="0"/>
           </a:p>
@@ -5847,7 +5845,7 @@
           <a:p>
             <a:r>
               <a:rPr lang="en-US" dirty="0"/>
-              <a:t>I complete the second page of the logbook: the matter taught, the evaluation, the homework and the attendance.</a:t>
+              <a:t>These are the references and picture credits used to prepare this lesson.</a:t>
             </a:r>
             <a:endParaRPr lang="en-US" dirty="0"/>
           </a:p>
@@ -5871,182 +5869,6 @@
             <a:fld id="{F7021451-1387-4CA6-816F-3879F97B5CBC}" type="slidenum">
               <a:rPr lang="en-US"/>
               <a:t>64</a:t>
-            </a:fld>
-            <a:endParaRPr lang="en-US"/>
-          </a:p>
-        </p:txBody>
-      </p:sp>
-    </p:spTree>
-    <p:extLst>
-      <p:ext uri="{BB962C8B-B14F-4D97-AF65-F5344CB8AC3E}">
-        <p14:creationId xmlns:p14="http://schemas.microsoft.com/office/powerpoint/2010/main" val="1024086991"/>
-      </p:ext>
-    </p:extLst>
-  </p:cSld>
-  <p:clrMapOvr>
-    <a:masterClrMapping/>
-  </p:clrMapOvr>
-</p:notes>
-</file>
-
-<file path=ppt/notesSlides/notesSlide65.xml><?xml version="1.0" encoding="utf-8"?>
-<p:notes xmlns:a="http://schemas.openxmlformats.org/drawingml/2006/main" xmlns:r="http://schemas.openxmlformats.org/officeDocument/2006/relationships" xmlns:p="http://schemas.openxmlformats.org/presentationml/2006/main">
-  <p:cSld>
-    <p:spTree>
-      <p:nvGrpSpPr>
-        <p:cNvPr id="1" name=""/>
-        <p:cNvGrpSpPr/>
-        <p:nvPr/>
-      </p:nvGrpSpPr>
-      <p:grpSpPr>
-        <a:xfrm>
-          <a:off x="0" y="0"/>
-          <a:ext cx="0" cy="0"/>
-          <a:chOff x="0" y="0"/>
-          <a:chExt cx="0" cy="0"/>
-        </a:xfrm>
-      </p:grpSpPr>
-      <p:sp>
-        <p:nvSpPr>
-          <p:cNvPr id="2" name="Slide Image Placeholder 1"/>
-          <p:cNvSpPr>
-            <a:spLocks noGrp="1" noRot="1" noChangeAspect="1"/>
-          </p:cNvSpPr>
-          <p:nvPr>
-            <p:ph type="sldImg"/>
-          </p:nvPr>
-        </p:nvSpPr>
-        <p:spPr/>
-      </p:sp>
-      <p:sp>
-        <p:nvSpPr>
-          <p:cNvPr id="3" name="Notes Placeholder 2"/>
-          <p:cNvSpPr>
-            <a:spLocks noGrp="1"/>
-          </p:cNvSpPr>
-          <p:nvPr>
-            <p:ph type="body" idx="1"/>
-          </p:nvPr>
-        </p:nvSpPr>
-        <p:spPr/>
-        <p:txBody>
-          <a:bodyPr/>
-          <a:lstStyle/>
-          <a:p>
-            <a:r>
-              <a:rPr lang="en-US" dirty="0"/>
-              <a:t>This slide is for me, the teacher: it gives the timing of the lesson and what to do if the projector is not available.</a:t>
-            </a:r>
-            <a:endParaRPr lang="en-US" dirty="0"/>
-          </a:p>
-        </p:txBody>
-      </p:sp>
-      <p:sp>
-        <p:nvSpPr>
-          <p:cNvPr id="4" name="Slide Number Placeholder 3"/>
-          <p:cNvSpPr>
-            <a:spLocks noGrp="1"/>
-          </p:cNvSpPr>
-          <p:nvPr>
-            <p:ph type="sldNum" sz="quarter" idx="10"/>
-          </p:nvPr>
-        </p:nvSpPr>
-        <p:spPr/>
-        <p:txBody>
-          <a:bodyPr/>
-          <a:lstStyle/>
-          <a:p>
-            <a:fld id="{F7021451-1387-4CA6-816F-3879F97B5CBC}" type="slidenum">
-              <a:rPr lang="en-US"/>
-              <a:t>65</a:t>
-            </a:fld>
-            <a:endParaRPr lang="en-US"/>
-          </a:p>
-        </p:txBody>
-      </p:sp>
-    </p:spTree>
-    <p:extLst>
-      <p:ext uri="{BB962C8B-B14F-4D97-AF65-F5344CB8AC3E}">
-        <p14:creationId xmlns:p14="http://schemas.microsoft.com/office/powerpoint/2010/main" val="1024086991"/>
-      </p:ext>
-    </p:extLst>
-  </p:cSld>
-  <p:clrMapOvr>
-    <a:masterClrMapping/>
-  </p:clrMapOvr>
-</p:notes>
-</file>
-
-<file path=ppt/notesSlides/notesSlide66.xml><?xml version="1.0" encoding="utf-8"?>
-<p:notes xmlns:a="http://schemas.openxmlformats.org/drawingml/2006/main" xmlns:r="http://schemas.openxmlformats.org/officeDocument/2006/relationships" xmlns:p="http://schemas.openxmlformats.org/presentationml/2006/main">
-  <p:cSld>
-    <p:spTree>
-      <p:nvGrpSpPr>
-        <p:cNvPr id="1" name=""/>
-        <p:cNvGrpSpPr/>
-        <p:nvPr/>
-      </p:nvGrpSpPr>
-      <p:grpSpPr>
-        <a:xfrm>
-          <a:off x="0" y="0"/>
-          <a:ext cx="0" cy="0"/>
-          <a:chOff x="0" y="0"/>
-          <a:chExt cx="0" cy="0"/>
-        </a:xfrm>
-      </p:grpSpPr>
-      <p:sp>
-        <p:nvSpPr>
-          <p:cNvPr id="2" name="Slide Image Placeholder 1"/>
-          <p:cNvSpPr>
-            <a:spLocks noGrp="1" noRot="1" noChangeAspect="1"/>
-          </p:cNvSpPr>
-          <p:nvPr>
-            <p:ph type="sldImg"/>
-          </p:nvPr>
-        </p:nvSpPr>
-        <p:spPr/>
-      </p:sp>
-      <p:sp>
-        <p:nvSpPr>
-          <p:cNvPr id="3" name="Notes Placeholder 2"/>
-          <p:cNvSpPr>
-            <a:spLocks noGrp="1"/>
-          </p:cNvSpPr>
-          <p:nvPr>
-            <p:ph type="body" idx="1"/>
-          </p:nvPr>
-        </p:nvSpPr>
-        <p:spPr/>
-        <p:txBody>
-          <a:bodyPr/>
-          <a:lstStyle/>
-          <a:p>
-            <a:r>
-              <a:rPr lang="en-US" dirty="0"/>
-              <a:t>These are the references and picture credits used to prepare this lesson.</a:t>
-            </a:r>
-            <a:endParaRPr lang="en-US" dirty="0"/>
-          </a:p>
-        </p:txBody>
-      </p:sp>
-      <p:sp>
-        <p:nvSpPr>
-          <p:cNvPr id="4" name="Slide Number Placeholder 3"/>
-          <p:cNvSpPr>
-            <a:spLocks noGrp="1"/>
-          </p:cNvSpPr>
-          <p:nvPr>
-            <p:ph type="sldNum" sz="quarter" idx="10"/>
-          </p:nvPr>
-        </p:nvSpPr>
-        <p:spPr/>
-        <p:txBody>
-          <a:bodyPr/>
-          <a:lstStyle/>
-          <a:p>
-            <a:fld id="{F7021451-1387-4CA6-816F-3879F97B5CBC}" type="slidenum">
-              <a:rPr lang="en-US"/>
-              <a:t>66</a:t>
             </a:fld>
             <a:endParaRPr lang="en-US"/>
           </a:p>
@@ -15619,7 +15441,7 @@
         <p:spPr>
           <a:xfrm>
             <a:off x="365760" y="1737360"/>
-            <a:ext cx="5120640" cy="457200"/>
+            <a:ext cx="6035040" cy="457200"/>
           </a:xfrm>
           <a:prstGeom prst="rect">
             <a:avLst/>
@@ -15645,7 +15467,7 @@
                 <a:ea typeface="Times New Roman" pitchFamily="34" charset="-122"/>
                 <a:cs typeface="Times New Roman" pitchFamily="34" charset="-120"/>
               </a:rPr>
-              <a:t>A) Before 1750 and the Industrial Revolution</a:t>
+              <a:t>A) Up to the Industrial Revolution</a:t>
             </a:r>
             <a:endParaRPr lang="en-US" sz="3000" dirty="0"/>
           </a:p>
@@ -15660,7 +15482,7 @@
         <p:spPr>
           <a:xfrm>
             <a:off x="365760" y="2240280"/>
-            <a:ext cx="4846320" cy="4160520"/>
+            <a:ext cx="6035040" cy="4160520"/>
           </a:xfrm>
           <a:prstGeom prst="rect">
             <a:avLst/>
@@ -15687,7 +15509,7 @@
                 <a:ea typeface="Times New Roman" pitchFamily="34" charset="-122"/>
                 <a:cs typeface="Times New Roman" pitchFamily="34" charset="-120"/>
               </a:rPr>
-              <a:t>The growth of the world population before 1900 is presented as follows:</a:t>
+              <a:t>The world population grew as follows up to and during the Industrial Revolution:</a:t>
             </a:r>
             <a:endParaRPr lang="en-US" sz="2800" dirty="0"/>
           </a:p>
@@ -15724,7 +15546,7 @@
                 <a:ea typeface="Times New Roman" pitchFamily="34" charset="-122"/>
                 <a:cs typeface="Times New Roman" pitchFamily="34" charset="-120"/>
               </a:rPr>
-              <a:t>For thousands of years, high birth rates were cancelled by high death rates from famine, wars and epidemics such as the Black Death.</a:t>
+              <a:t>For thousands of years, high birth rates were cancelled by high death rates from famine, wars and epidemics such as the Black Death. The population therefore grew very slowly.</a:t>
             </a:r>
             <a:endParaRPr lang="en-US" sz="2800" dirty="0"/>
           </a:p>
@@ -15746,8 +15568,8 @@
         </p:blipFill>
         <p:spPr>
           <a:xfrm>
-            <a:off x="5349240" y="2461422"/>
-            <a:ext cx="6659575" cy="2913564"/>
+            <a:off x="6537960" y="2721454"/>
+            <a:ext cx="5470855" cy="2393499"/>
           </a:xfrm>
           <a:prstGeom prst="rect">
             <a:avLst/>
@@ -15762,8 +15584,8 @@
         </p:nvSpPr>
         <p:spPr>
           <a:xfrm>
-            <a:off x="5349240" y="6089904"/>
-            <a:ext cx="6659575" cy="347472"/>
+            <a:off x="6537960" y="6089904"/>
+            <a:ext cx="5470855" cy="347472"/>
           </a:xfrm>
           <a:prstGeom prst="rect">
             <a:avLst/>
@@ -15787,7 +15609,7 @@
                 <a:ea typeface="Times New Roman" pitchFamily="34" charset="-122"/>
                 <a:cs typeface="Times New Roman" pitchFamily="34" charset="-120"/>
               </a:rPr>
-              <a:t>Illustration: the J-curve</a:t>
+              <a:t>Illustration: the growth of world population</a:t>
             </a:r>
             <a:endParaRPr lang="en-US" sz="1600" dirty="0"/>
           </a:p>
@@ -15995,7 +15817,7 @@
               <a:buNone/>
             </a:pPr>
             <a:r>
-              <a:rPr lang="en-US" sz="2300" b="1" dirty="0">
+              <a:rPr lang="en-US" sz="3000" b="1" dirty="0">
                 <a:solidFill>
                   <a:srgbClr val="990011"/>
                 </a:solidFill>
@@ -16003,9 +15825,9 @@
                 <a:ea typeface="Times New Roman" pitchFamily="34" charset="-122"/>
                 <a:cs typeface="Times New Roman" pitchFamily="34" charset="-120"/>
               </a:rPr>
-              <a:t>A) Before 1750 and the Industrial Revolution</a:t>
-            </a:r>
-            <a:endParaRPr lang="en-US" sz="2300" dirty="0"/>
+              <a:t>A) Up to the Industrial Revolution</a:t>
+            </a:r>
+            <a:endParaRPr lang="en-US" sz="3000" dirty="0"/>
           </a:p>
         </p:txBody>
       </p:sp>
@@ -16045,7 +15867,7 @@
                 <a:ea typeface="Times New Roman" pitchFamily="34" charset="-122"/>
                 <a:cs typeface="Times New Roman" pitchFamily="34" charset="-120"/>
               </a:rPr>
-              <a:t>Small population: </a:t>
+              <a:t>A small population: </a:t>
             </a:r>
             <a:pPr algn="l" indent="0" marL="0">
               <a:spcAft>
@@ -16062,7 +15884,7 @@
                 <a:ea typeface="Times New Roman" pitchFamily="34" charset="-122"/>
                 <a:cs typeface="Times New Roman" pitchFamily="34" charset="-120"/>
               </a:rPr>
-              <a:t>The world had only about 300 million people in the year 1 and about 1 billion around 1804.</a:t>
+              <a:t>The world had only about 300 million people in the year 1. It reached its first billion only around 1804.</a:t>
             </a:r>
             <a:endParaRPr lang="en-US" sz="4000" dirty="0"/>
           </a:p>
@@ -16469,7 +16291,7 @@
         <p:spPr>
           <a:xfrm>
             <a:off x="365760" y="1737360"/>
-            <a:ext cx="5120640" cy="457200"/>
+            <a:ext cx="6035040" cy="457200"/>
           </a:xfrm>
           <a:prstGeom prst="rect">
             <a:avLst/>
@@ -16495,7 +16317,7 @@
                 <a:ea typeface="Times New Roman" pitchFamily="34" charset="-122"/>
                 <a:cs typeface="Times New Roman" pitchFamily="34" charset="-120"/>
               </a:rPr>
-              <a:t>A) Before 1750 and the Industrial Revolution</a:t>
+              <a:t>A) Up to the Industrial Revolution</a:t>
             </a:r>
             <a:endParaRPr lang="en-US" sz="3000" dirty="0"/>
           </a:p>
@@ -16510,7 +16332,7 @@
         <p:spPr>
           <a:xfrm>
             <a:off x="365760" y="2240280"/>
-            <a:ext cx="4846320" cy="4160520"/>
+            <a:ext cx="6035040" cy="4160520"/>
           </a:xfrm>
           <a:prstGeom prst="rect">
             <a:avLst/>
@@ -16554,7 +16376,7 @@
                 <a:ea typeface="Times New Roman" pitchFamily="34" charset="-122"/>
                 <a:cs typeface="Times New Roman" pitchFamily="34" charset="-120"/>
               </a:rPr>
-              <a:t>From the late 18th century in Europe and North America, vaccines, clean water, sewers and new farm machines reduced deaths.</a:t>
+              <a:t>From the late 18th century in Europe and North America, vaccines, clean water, sewers and new farm machines reduced deaths. Death rates fell while birth rates stayed high, so the population began to grow rapidly.</a:t>
             </a:r>
             <a:endParaRPr lang="en-US" sz="3200" dirty="0"/>
           </a:p>
@@ -16576,8 +16398,8 @@
         </p:blipFill>
         <p:spPr>
           <a:xfrm>
-            <a:off x="5349240" y="2071212"/>
-            <a:ext cx="6659575" cy="3693983"/>
+            <a:off x="6537960" y="2400897"/>
+            <a:ext cx="5470855" cy="3034615"/>
           </a:xfrm>
           <a:prstGeom prst="rect">
             <a:avLst/>
@@ -16592,8 +16414,8 @@
         </p:nvSpPr>
         <p:spPr>
           <a:xfrm>
-            <a:off x="5349240" y="6089904"/>
-            <a:ext cx="6659575" cy="347472"/>
+            <a:off x="6537960" y="6089904"/>
+            <a:ext cx="5470855" cy="347472"/>
           </a:xfrm>
           <a:prstGeom prst="rect">
             <a:avLst/>
@@ -16752,7 +16574,7 @@
         <p:spPr>
           <a:xfrm>
             <a:off x="0" y="658368"/>
-            <a:ext cx="5120640" cy="5833872"/>
+            <a:ext cx="1463040" cy="5833872"/>
           </a:xfrm>
           <a:prstGeom prst="rect">
             <a:avLst/>
@@ -16767,8 +16589,8 @@
         </p:nvSpPr>
         <p:spPr>
           <a:xfrm>
-            <a:off x="5349240" y="1005840"/>
-            <a:ext cx="6522415" cy="731520"/>
+            <a:off x="1691640" y="1005840"/>
+            <a:ext cx="10180015" cy="731520"/>
           </a:xfrm>
           <a:prstGeom prst="rect">
             <a:avLst/>
@@ -16808,8 +16630,8 @@
         </p:nvSpPr>
         <p:spPr>
           <a:xfrm>
-            <a:off x="5349240" y="1737360"/>
-            <a:ext cx="6522415" cy="457200"/>
+            <a:off x="1691640" y="1737360"/>
+            <a:ext cx="10180015" cy="457200"/>
           </a:xfrm>
           <a:prstGeom prst="rect">
             <a:avLst/>
@@ -16825,7 +16647,7 @@
               <a:buNone/>
             </a:pPr>
             <a:r>
-              <a:rPr lang="en-US" sz="2300" b="1" dirty="0">
+              <a:rPr lang="en-US" sz="3200" b="1" dirty="0">
                 <a:solidFill>
                   <a:srgbClr val="990011"/>
                 </a:solidFill>
@@ -16833,9 +16655,9 @@
                 <a:ea typeface="Times New Roman" pitchFamily="34" charset="-122"/>
                 <a:cs typeface="Times New Roman" pitchFamily="34" charset="-120"/>
               </a:rPr>
-              <a:t>A) Before 1750 and the Industrial Revolution</a:t>
-            </a:r>
-            <a:endParaRPr lang="en-US" sz="2300" dirty="0"/>
+              <a:t>B) After the Industrial Revolution to the Present</a:t>
+            </a:r>
+            <a:endParaRPr lang="en-US" sz="3200" dirty="0"/>
           </a:p>
         </p:txBody>
       </p:sp>
@@ -16847,8 +16669,8 @@
         </p:nvSpPr>
         <p:spPr>
           <a:xfrm>
-            <a:off x="5349240" y="2240280"/>
-            <a:ext cx="6522415" cy="4206240"/>
+            <a:off x="1691640" y="2240280"/>
+            <a:ext cx="10180015" cy="4206240"/>
           </a:xfrm>
           <a:prstGeom prst="rect">
             <a:avLst/>
@@ -16867,7 +16689,7 @@
               <a:buNone/>
             </a:pPr>
             <a:r>
-              <a:rPr lang="en-US" sz="4000" b="1" dirty="0">
+              <a:rPr lang="en-US" sz="3600" i="1" dirty="0">
                 <a:solidFill>
                   <a:srgbClr val="111111"/>
                 </a:solidFill>
@@ -16875,8 +16697,11 @@
                 <a:ea typeface="Times New Roman" pitchFamily="34" charset="-122"/>
                 <a:cs typeface="Times New Roman" pitchFamily="34" charset="-120"/>
               </a:rPr>
-              <a:t>Result: </a:t>
-            </a:r>
+              <a:t>The world population has grown as follows since the Industrial Revolution:</a:t>
+            </a:r>
+            <a:endParaRPr lang="en-US" sz="3600" dirty="0"/>
+          </a:p>
+          <a:p>
             <a:pPr algn="l" indent="0" marL="0">
               <a:spcAft>
                 <a:spcPts val="800"/>
@@ -16884,7 +16709,7 @@
               <a:buNone/>
             </a:pPr>
             <a:r>
-              <a:rPr lang="en-US" sz="4000" dirty="0">
+              <a:rPr lang="en-US" sz="3600" b="1" dirty="0">
                 <a:solidFill>
                   <a:srgbClr val="111111"/>
                 </a:solidFill>
@@ -16892,9 +16717,26 @@
                 <a:ea typeface="Times New Roman" pitchFamily="34" charset="-122"/>
                 <a:cs typeface="Times New Roman" pitchFamily="34" charset="-120"/>
               </a:rPr>
-              <a:t>Death rates fell while birth rates stayed high, so the population began to grow rapidly.</a:t>
-            </a:r>
-            <a:endParaRPr lang="en-US" sz="4000" dirty="0"/>
+              <a:t>The population explosion: </a:t>
+            </a:r>
+            <a:pPr algn="l" indent="0" marL="0">
+              <a:spcAft>
+                <a:spcPts val="800"/>
+              </a:spcAft>
+              <a:buNone/>
+            </a:pPr>
+            <a:r>
+              <a:rPr lang="en-US" sz="3600" dirty="0">
+                <a:solidFill>
+                  <a:srgbClr val="111111"/>
+                </a:solidFill>
+                <a:latin typeface="Times New Roman" pitchFamily="34" charset="0"/>
+                <a:ea typeface="Times New Roman" pitchFamily="34" charset="-122"/>
+                <a:cs typeface="Times New Roman" pitchFamily="34" charset="-120"/>
+              </a:rPr>
+              <a:t>After 1950, medicine and new farming methods reached Africa, Asia and Latin America, where populations grew very fast. The world population rose from about 2.5 billion in 1950 to about 6 billion in 1999.</a:t>
+            </a:r>
+            <a:endParaRPr lang="en-US" sz="3600" dirty="0"/>
           </a:p>
         </p:txBody>
       </p:sp>
@@ -17010,9 +16852,150 @@
           </a:p>
         </p:txBody>
       </p:sp>
+      <p:sp>
+        <p:nvSpPr>
+          <p:cNvPr id="3" name="Text 1"/>
+          <p:cNvSpPr/>
+          <p:nvPr/>
+        </p:nvSpPr>
+        <p:spPr>
+          <a:xfrm>
+            <a:off x="365760" y="1005840"/>
+            <a:ext cx="11460175" cy="731520"/>
+          </a:xfrm>
+          <a:prstGeom prst="rect">
+            <a:avLst/>
+          </a:prstGeom>
+          <a:noFill/>
+          <a:ln/>
+        </p:spPr>
+        <p:txBody>
+          <a:bodyPr wrap="square" lIns="0" tIns="0" rIns="0" bIns="0" rtlCol="0" anchor="ctr">
+            <a:normAutofit/>
+          </a:bodyPr>
+          <a:lstStyle/>
+          <a:p>
+            <a:pPr algn="ctr" indent="0" marL="0">
+              <a:buNone/>
+            </a:pPr>
+            <a:r>
+              <a:rPr lang="en-US" sz="3600" b="1" dirty="0">
+                <a:solidFill>
+                  <a:srgbClr val="990011"/>
+                </a:solidFill>
+                <a:latin typeface="Times New Roman" pitchFamily="34" charset="0"/>
+                <a:ea typeface="Times New Roman" pitchFamily="34" charset="-122"/>
+                <a:cs typeface="Times New Roman" pitchFamily="34" charset="-120"/>
+              </a:rPr>
+              <a:t>1. Global Trends of Population Change over Time</a:t>
+            </a:r>
+            <a:endParaRPr lang="en-US" sz="3600" dirty="0"/>
+          </a:p>
+        </p:txBody>
+      </p:sp>
+      <p:sp>
+        <p:nvSpPr>
+          <p:cNvPr id="4" name="Text 2"/>
+          <p:cNvSpPr/>
+          <p:nvPr/>
+        </p:nvSpPr>
+        <p:spPr>
+          <a:xfrm>
+            <a:off x="365760" y="1737360"/>
+            <a:ext cx="6035040" cy="457200"/>
+          </a:xfrm>
+          <a:prstGeom prst="rect">
+            <a:avLst/>
+          </a:prstGeom>
+          <a:noFill/>
+          <a:ln/>
+        </p:spPr>
+        <p:txBody>
+          <a:bodyPr wrap="square" lIns="0" tIns="0" rIns="0" bIns="0" rtlCol="0" anchor="ctr">
+            <a:normAutofit/>
+          </a:bodyPr>
+          <a:lstStyle/>
+          <a:p>
+            <a:pPr algn="l" indent="0" marL="0">
+              <a:buNone/>
+            </a:pPr>
+            <a:r>
+              <a:rPr lang="en-US" sz="3000" b="1" dirty="0">
+                <a:solidFill>
+                  <a:srgbClr val="990011"/>
+                </a:solidFill>
+                <a:latin typeface="Times New Roman" pitchFamily="34" charset="0"/>
+                <a:ea typeface="Times New Roman" pitchFamily="34" charset="-122"/>
+                <a:cs typeface="Times New Roman" pitchFamily="34" charset="-120"/>
+              </a:rPr>
+              <a:t>B) After the Industrial Revolution to the Present</a:t>
+            </a:r>
+            <a:endParaRPr lang="en-US" sz="3000" dirty="0"/>
+          </a:p>
+        </p:txBody>
+      </p:sp>
+      <p:sp>
+        <p:nvSpPr>
+          <p:cNvPr id="5" name="Text 3"/>
+          <p:cNvSpPr/>
+          <p:nvPr/>
+        </p:nvSpPr>
+        <p:spPr>
+          <a:xfrm>
+            <a:off x="365760" y="2240280"/>
+            <a:ext cx="6035040" cy="4160520"/>
+          </a:xfrm>
+          <a:prstGeom prst="rect">
+            <a:avLst/>
+          </a:prstGeom>
+          <a:noFill/>
+          <a:ln/>
+        </p:spPr>
+        <p:txBody>
+          <a:bodyPr wrap="square" lIns="0" tIns="0" rIns="0" bIns="0" rtlCol="0" anchor="t"/>
+          <a:lstStyle/>
+          <a:p>
+            <a:pPr algn="l" indent="0" marL="0">
+              <a:spcAft>
+                <a:spcPts val="800"/>
+              </a:spcAft>
+              <a:buNone/>
+            </a:pPr>
+            <a:r>
+              <a:rPr lang="en-US" sz="3600" b="1" dirty="0">
+                <a:solidFill>
+                  <a:srgbClr val="111111"/>
+                </a:solidFill>
+                <a:latin typeface="Times New Roman" pitchFamily="34" charset="0"/>
+                <a:ea typeface="Times New Roman" pitchFamily="34" charset="-122"/>
+                <a:cs typeface="Times New Roman" pitchFamily="34" charset="-120"/>
+              </a:rPr>
+              <a:t>Milestones: </a:t>
+            </a:r>
+            <a:pPr algn="l" indent="0" marL="0">
+              <a:spcAft>
+                <a:spcPts val="800"/>
+              </a:spcAft>
+              <a:buNone/>
+            </a:pPr>
+            <a:r>
+              <a:rPr lang="en-US" sz="3600" dirty="0">
+                <a:solidFill>
+                  <a:srgbClr val="111111"/>
+                </a:solidFill>
+                <a:latin typeface="Times New Roman" pitchFamily="34" charset="0"/>
+                <a:ea typeface="Times New Roman" pitchFamily="34" charset="-122"/>
+                <a:cs typeface="Times New Roman" pitchFamily="34" charset="-120"/>
+              </a:rPr>
+              <a:t>The world reached 2 billion in 1927, 3 billion in 1960, 4 billion in 1974 and 5 billion in 1987. It then reached 6 billion in 1999, 7 billion in 2011 and 8 billion in 2022.</a:t>
+            </a:r>
+            <a:endParaRPr lang="en-US" sz="3600" dirty="0"/>
+          </a:p>
+        </p:txBody>
+      </p:sp>
       <p:pic>
         <p:nvPicPr>
-          <p:cNvPr id="3" name="Image 0" descr="/home/claude/f4/img/minesec_sheet.png">    </p:cNvPr>
+          <p:cNvPr id="6" name="Image 0" descr="/home/claude/f4/img/v2/pop2_milestones.png">    </p:cNvPr>
           <p:cNvPicPr>
             <a:picLocks noChangeAspect="1"/>
           </p:cNvPicPr>
@@ -17026,8 +17009,8 @@
         </p:blipFill>
         <p:spPr>
           <a:xfrm>
-            <a:off x="0" y="658368"/>
-            <a:ext cx="3840480" cy="5833872"/>
+            <a:off x="6537960" y="2721454"/>
+            <a:ext cx="5470855" cy="2393499"/>
           </a:xfrm>
           <a:prstGeom prst="rect">
             <a:avLst/>
@@ -17036,14 +17019,14 @@
       </p:pic>
       <p:sp>
         <p:nvSpPr>
-          <p:cNvPr id="4" name="Text 1"/>
+          <p:cNvPr id="7" name="Text 4"/>
           <p:cNvSpPr/>
           <p:nvPr/>
         </p:nvSpPr>
         <p:spPr>
           <a:xfrm>
-            <a:off x="4069080" y="1005840"/>
-            <a:ext cx="7802575" cy="731520"/>
+            <a:off x="6537960" y="6089904"/>
+            <a:ext cx="5470855" cy="347472"/>
           </a:xfrm>
           <a:prstGeom prst="rect">
             <a:avLst/>
@@ -17052,144 +17035,24 @@
           <a:ln/>
         </p:spPr>
         <p:txBody>
-          <a:bodyPr wrap="square" lIns="0" tIns="0" rIns="0" bIns="0" rtlCol="0" anchor="ctr">
-            <a:normAutofit/>
-          </a:bodyPr>
+          <a:bodyPr wrap="square" lIns="0" tIns="0" rIns="0" bIns="0" rtlCol="0" anchor="ctr"/>
           <a:lstStyle/>
           <a:p>
             <a:pPr algn="ctr" indent="0" marL="0">
               <a:buNone/>
             </a:pPr>
             <a:r>
-              <a:rPr lang="en-US" sz="3600" b="1" dirty="0">
-                <a:solidFill>
-                  <a:srgbClr val="990011"/>
+              <a:rPr lang="en-US" sz="1600" i="1" dirty="0">
+                <a:solidFill>
+                  <a:srgbClr val="555555"/>
                 </a:solidFill>
                 <a:latin typeface="Times New Roman" pitchFamily="34" charset="0"/>
                 <a:ea typeface="Times New Roman" pitchFamily="34" charset="-122"/>
                 <a:cs typeface="Times New Roman" pitchFamily="34" charset="-120"/>
               </a:rPr>
-              <a:t>1. Global Trends of Population Change over Time</a:t>
-            </a:r>
-            <a:endParaRPr lang="en-US" sz="3600" dirty="0"/>
-          </a:p>
-        </p:txBody>
-      </p:sp>
-      <p:sp>
-        <p:nvSpPr>
-          <p:cNvPr id="5" name="Text 2"/>
-          <p:cNvSpPr/>
-          <p:nvPr/>
-        </p:nvSpPr>
-        <p:spPr>
-          <a:xfrm>
-            <a:off x="4069080" y="1737360"/>
-            <a:ext cx="7802575" cy="457200"/>
-          </a:xfrm>
-          <a:prstGeom prst="rect">
-            <a:avLst/>
-          </a:prstGeom>
-          <a:noFill/>
-          <a:ln/>
-        </p:spPr>
-        <p:txBody>
-          <a:bodyPr wrap="square" lIns="0" tIns="0" rIns="0" bIns="0" rtlCol="0" anchor="ctr"/>
-          <a:lstStyle/>
-          <a:p>
-            <a:pPr algn="l" indent="0" marL="0">
-              <a:buNone/>
-            </a:pPr>
-            <a:r>
-              <a:rPr lang="en-US" sz="3200" b="1" dirty="0">
-                <a:solidFill>
-                  <a:srgbClr val="990011"/>
-                </a:solidFill>
-                <a:latin typeface="Times New Roman" pitchFamily="34" charset="0"/>
-                <a:ea typeface="Times New Roman" pitchFamily="34" charset="-122"/>
-                <a:cs typeface="Times New Roman" pitchFamily="34" charset="-120"/>
-              </a:rPr>
-              <a:t>B) The Population Explosion since 1950</a:t>
-            </a:r>
-            <a:endParaRPr lang="en-US" sz="3200" dirty="0"/>
-          </a:p>
-        </p:txBody>
-      </p:sp>
-      <p:sp>
-        <p:nvSpPr>
-          <p:cNvPr id="6" name="Text 3"/>
-          <p:cNvSpPr/>
-          <p:nvPr/>
-        </p:nvSpPr>
-        <p:spPr>
-          <a:xfrm>
-            <a:off x="4069080" y="2240280"/>
-            <a:ext cx="7802575" cy="4206240"/>
-          </a:xfrm>
-          <a:prstGeom prst="rect">
-            <a:avLst/>
-          </a:prstGeom>
-          <a:noFill/>
-          <a:ln/>
-        </p:spPr>
-        <p:txBody>
-          <a:bodyPr wrap="square" lIns="0" tIns="0" rIns="0" bIns="0" rtlCol="0" anchor="t"/>
-          <a:lstStyle/>
-          <a:p>
-            <a:pPr algn="l" indent="0" marL="0">
-              <a:spcAft>
-                <a:spcPts val="800"/>
-              </a:spcAft>
-              <a:buNone/>
-            </a:pPr>
-            <a:r>
-              <a:rPr lang="en-US" sz="4000" i="1" dirty="0">
-                <a:solidFill>
-                  <a:srgbClr val="111111"/>
-                </a:solidFill>
-                <a:latin typeface="Times New Roman" pitchFamily="34" charset="0"/>
-                <a:ea typeface="Times New Roman" pitchFamily="34" charset="-122"/>
-                <a:cs typeface="Times New Roman" pitchFamily="34" charset="-120"/>
-              </a:rPr>
-              <a:t>The population explosion since 1950 is presented as follows:</a:t>
-            </a:r>
-            <a:endParaRPr lang="en-US" sz="4000" dirty="0"/>
-          </a:p>
-          <a:p>
-            <a:pPr algn="l" indent="0" marL="0">
-              <a:spcAft>
-                <a:spcPts val="800"/>
-              </a:spcAft>
-              <a:buNone/>
-            </a:pPr>
-            <a:r>
-              <a:rPr lang="en-US" sz="4000" b="1" dirty="0">
-                <a:solidFill>
-                  <a:srgbClr val="111111"/>
-                </a:solidFill>
-                <a:latin typeface="Times New Roman" pitchFamily="34" charset="0"/>
-                <a:ea typeface="Times New Roman" pitchFamily="34" charset="-122"/>
-                <a:cs typeface="Times New Roman" pitchFamily="34" charset="-120"/>
-              </a:rPr>
-              <a:t>Doubling: </a:t>
-            </a:r>
-            <a:pPr algn="l" indent="0" marL="0">
-              <a:spcAft>
-                <a:spcPts val="800"/>
-              </a:spcAft>
-              <a:buNone/>
-            </a:pPr>
-            <a:r>
-              <a:rPr lang="en-US" sz="4000" dirty="0">
-                <a:solidFill>
-                  <a:srgbClr val="111111"/>
-                </a:solidFill>
-                <a:latin typeface="Times New Roman" pitchFamily="34" charset="0"/>
-                <a:ea typeface="Times New Roman" pitchFamily="34" charset="-122"/>
-                <a:cs typeface="Times New Roman" pitchFamily="34" charset="-120"/>
-              </a:rPr>
-              <a:t>The world population rose from about 2.5 billion in 1950 to about 6 billion in 1999.</a:t>
-            </a:r>
-            <a:endParaRPr lang="en-US" sz="4000" dirty="0"/>
+              <a:t>Illustration: the milestones of world population</a:t>
+            </a:r>
+            <a:endParaRPr lang="en-US" sz="1600" dirty="0"/>
           </a:p>
         </p:txBody>
       </p:sp>
@@ -17322,7 +17185,7 @@
         <p:spPr>
           <a:xfrm>
             <a:off x="0" y="658368"/>
-            <a:ext cx="1463040" cy="5833872"/>
+            <a:ext cx="3840480" cy="5833872"/>
           </a:xfrm>
           <a:prstGeom prst="rect">
             <a:avLst/>
@@ -17337,8 +17200,8 @@
         </p:nvSpPr>
         <p:spPr>
           <a:xfrm>
-            <a:off x="1691640" y="1005840"/>
-            <a:ext cx="10180015" cy="731520"/>
+            <a:off x="4069080" y="1005840"/>
+            <a:ext cx="7802575" cy="731520"/>
           </a:xfrm>
           <a:prstGeom prst="rect">
             <a:avLst/>
@@ -17378,8 +17241,8 @@
         </p:nvSpPr>
         <p:spPr>
           <a:xfrm>
-            <a:off x="1691640" y="1737360"/>
-            <a:ext cx="10180015" cy="457200"/>
+            <a:off x="4069080" y="1737360"/>
+            <a:ext cx="7802575" cy="457200"/>
           </a:xfrm>
           <a:prstGeom prst="rect">
             <a:avLst/>
@@ -17395,7 +17258,7 @@
               <a:buNone/>
             </a:pPr>
             <a:r>
-              <a:rPr lang="en-US" sz="3200" b="1" dirty="0">
+              <a:rPr lang="en-US" sz="2500" b="1" dirty="0">
                 <a:solidFill>
                   <a:srgbClr val="990011"/>
                 </a:solidFill>
@@ -17403,9 +17266,9 @@
                 <a:ea typeface="Times New Roman" pitchFamily="34" charset="-122"/>
                 <a:cs typeface="Times New Roman" pitchFamily="34" charset="-120"/>
               </a:rPr>
-              <a:t>B) The Population Explosion since 1950 (continued)</a:t>
-            </a:r>
-            <a:endParaRPr lang="en-US" sz="3200" dirty="0"/>
+              <a:t>B) After the Industrial Revolution to the Present</a:t>
+            </a:r>
+            <a:endParaRPr lang="en-US" sz="2500" dirty="0"/>
           </a:p>
         </p:txBody>
       </p:sp>
@@ -17417,8 +17280,8 @@
         </p:nvSpPr>
         <p:spPr>
           <a:xfrm>
-            <a:off x="1691640" y="2240280"/>
-            <a:ext cx="10180015" cy="4206240"/>
+            <a:off x="4069080" y="2240280"/>
+            <a:ext cx="7802575" cy="4206240"/>
           </a:xfrm>
           <a:prstGeom prst="rect">
             <a:avLst/>
@@ -17445,7 +17308,7 @@
                 <a:ea typeface="Times New Roman" pitchFamily="34" charset="-122"/>
                 <a:cs typeface="Times New Roman" pitchFamily="34" charset="-120"/>
               </a:rPr>
-              <a:t>Spread to developing countries: </a:t>
+              <a:t>An increasing rate of growth: </a:t>
             </a:r>
             <a:pPr algn="l" indent="0" marL="0">
               <a:spcAft>
@@ -17462,48 +17325,7 @@
                 <a:ea typeface="Times New Roman" pitchFamily="34" charset="-122"/>
                 <a:cs typeface="Times New Roman" pitchFamily="34" charset="-120"/>
               </a:rPr>
-              <a:t>Medicine and new farming methods reached Africa, Asia and Latin America, where populations grew very fast.</a:t>
-            </a:r>
-            <a:endParaRPr lang="en-US" sz="4000" dirty="0"/>
-          </a:p>
-          <a:p>
-            <a:pPr algn="l" indent="0" marL="0">
-              <a:spcAft>
-                <a:spcPts val="800"/>
-              </a:spcAft>
-              <a:buNone/>
-            </a:pPr>
-            <a:r>
-              <a:rPr lang="en-US" sz="4000" b="1" dirty="0">
-                <a:solidFill>
-                  <a:srgbClr val="111111"/>
-                </a:solidFill>
-                <a:latin typeface="Times New Roman" pitchFamily="34" charset="0"/>
-                <a:ea typeface="Times New Roman" pitchFamily="34" charset="-122"/>
-                <a:cs typeface="Times New Roman" pitchFamily="34" charset="-120"/>
-              </a:rPr>
-              <a:t>Milestones:</a:t>
-            </a:r>
-            <a:endParaRPr lang="en-US" sz="4000" dirty="0"/>
-          </a:p>
-          <a:p>
-            <a:pPr algn="l" marL="342900" indent="-342900">
-              <a:spcAft>
-                <a:spcPts val="800"/>
-              </a:spcAft>
-              <a:buSzPct val="100000"/>
-              <a:buChar char="•"/>
-            </a:pPr>
-            <a:r>
-              <a:rPr lang="en-US" sz="4000" dirty="0">
-                <a:solidFill>
-                  <a:srgbClr val="111111"/>
-                </a:solidFill>
-                <a:latin typeface="Times New Roman" pitchFamily="34" charset="0"/>
-                <a:ea typeface="Times New Roman" pitchFamily="34" charset="-122"/>
-                <a:cs typeface="Times New Roman" pitchFamily="34" charset="-120"/>
-              </a:rPr>
-              <a:t>1 billion in 1804 and 2 billion in 1927.</a:t>
+              <a:t>The second billion took 123 years, but each new billion now takes only about 12 years. The graph of world population therefore has the shape of a J.</a:t>
             </a:r>
             <a:endParaRPr lang="en-US" sz="4000" dirty="0"/>
           </a:p>
@@ -17638,7 +17460,7 @@
         <p:spPr>
           <a:xfrm>
             <a:off x="0" y="658368"/>
-            <a:ext cx="5120640" cy="5833872"/>
+            <a:ext cx="3840480" cy="5833872"/>
           </a:xfrm>
           <a:prstGeom prst="rect">
             <a:avLst/>
@@ -17653,8 +17475,8 @@
         </p:nvSpPr>
         <p:spPr>
           <a:xfrm>
-            <a:off x="5349240" y="1005840"/>
-            <a:ext cx="6522415" cy="731520"/>
+            <a:off x="4069080" y="1005840"/>
+            <a:ext cx="7802575" cy="731520"/>
           </a:xfrm>
           <a:prstGeom prst="rect">
             <a:avLst/>
@@ -17694,8 +17516,8 @@
         </p:nvSpPr>
         <p:spPr>
           <a:xfrm>
-            <a:off x="5349240" y="1737360"/>
-            <a:ext cx="6522415" cy="457200"/>
+            <a:off x="4069080" y="1737360"/>
+            <a:ext cx="7802575" cy="457200"/>
           </a:xfrm>
           <a:prstGeom prst="rect">
             <a:avLst/>
@@ -17711,7 +17533,7 @@
               <a:buNone/>
             </a:pPr>
             <a:r>
-              <a:rPr lang="en-US" sz="2000" b="1" dirty="0">
+              <a:rPr lang="en-US" sz="2500" b="1" dirty="0">
                 <a:solidFill>
                   <a:srgbClr val="990011"/>
                 </a:solidFill>
@@ -17719,9 +17541,9 @@
                 <a:ea typeface="Times New Roman" pitchFamily="34" charset="-122"/>
                 <a:cs typeface="Times New Roman" pitchFamily="34" charset="-120"/>
               </a:rPr>
-              <a:t>B) The Population Explosion since 1950 (continued)</a:t>
-            </a:r>
-            <a:endParaRPr lang="en-US" sz="2000" dirty="0"/>
+              <a:t>B) After the Industrial Revolution to the Present</a:t>
+            </a:r>
+            <a:endParaRPr lang="en-US" sz="2500" dirty="0"/>
           </a:p>
         </p:txBody>
       </p:sp>
@@ -17733,8 +17555,8 @@
         </p:nvSpPr>
         <p:spPr>
           <a:xfrm>
-            <a:off x="5349240" y="2240280"/>
-            <a:ext cx="6522415" cy="4206240"/>
+            <a:off x="4069080" y="2240280"/>
+            <a:ext cx="7802575" cy="4206240"/>
           </a:xfrm>
           <a:prstGeom prst="rect">
             <a:avLst/>
@@ -17746,15 +17568,14 @@
           <a:bodyPr wrap="square" lIns="0" tIns="0" rIns="0" bIns="0" rtlCol="0" anchor="t"/>
           <a:lstStyle/>
           <a:p>
-            <a:pPr algn="l" marL="342900" indent="-342900">
+            <a:pPr algn="l" indent="0" marL="0">
               <a:spcAft>
                 <a:spcPts val="800"/>
               </a:spcAft>
-              <a:buSzPct val="100000"/>
-              <a:buChar char="•"/>
-            </a:pPr>
-            <a:r>
-              <a:rPr lang="en-US" sz="4000" dirty="0">
+              <a:buNone/>
+            </a:pPr>
+            <a:r>
+              <a:rPr lang="en-US" sz="4000" b="1" dirty="0">
                 <a:solidFill>
                   <a:srgbClr val="111111"/>
                 </a:solidFill>
@@ -17762,17 +17583,13 @@
                 <a:ea typeface="Times New Roman" pitchFamily="34" charset="-122"/>
                 <a:cs typeface="Times New Roman" pitchFamily="34" charset="-120"/>
               </a:rPr>
-              <a:t>3 billion in 1960 and 4 billion in 1974.</a:t>
-            </a:r>
-            <a:endParaRPr lang="en-US" sz="4000" dirty="0"/>
-          </a:p>
-          <a:p>
-            <a:pPr algn="l" marL="342900" indent="-342900">
+              <a:t>Today: </a:t>
+            </a:r>
+            <a:pPr algn="l" indent="0" marL="0">
               <a:spcAft>
                 <a:spcPts val="800"/>
               </a:spcAft>
-              <a:buSzPct val="100000"/>
-              <a:buChar char="•"/>
+              <a:buNone/>
             </a:pPr>
             <a:r>
               <a:rPr lang="en-US" sz="4000" dirty="0">
@@ -17783,28 +17600,7 @@
                 <a:ea typeface="Times New Roman" pitchFamily="34" charset="-122"/>
                 <a:cs typeface="Times New Roman" pitchFamily="34" charset="-120"/>
               </a:rPr>
-              <a:t>5 billion in 1987 and 6 billion in 1999.</a:t>
-            </a:r>
-            <a:endParaRPr lang="en-US" sz="4000" dirty="0"/>
-          </a:p>
-          <a:p>
-            <a:pPr algn="l" marL="342900" indent="-342900">
-              <a:spcAft>
-                <a:spcPts val="800"/>
-              </a:spcAft>
-              <a:buSzPct val="100000"/>
-              <a:buChar char="•"/>
-            </a:pPr>
-            <a:r>
-              <a:rPr lang="en-US" sz="4000" dirty="0">
-                <a:solidFill>
-                  <a:srgbClr val="111111"/>
-                </a:solidFill>
-                <a:latin typeface="Times New Roman" pitchFamily="34" charset="0"/>
-                <a:ea typeface="Times New Roman" pitchFamily="34" charset="-122"/>
-                <a:cs typeface="Times New Roman" pitchFamily="34" charset="-120"/>
-              </a:rPr>
-              <a:t>7 billion in 2011 and 8 billion in 2022.</a:t>
+              <a:t>Growth continues, but the growth rate has been falling since the 1960s as families become smaller. The population is expected to stop growing in the second half of this century.</a:t>
             </a:r>
             <a:endParaRPr lang="en-US" sz="4000" dirty="0"/>
           </a:p>
@@ -17957,7 +17753,7 @@
                 <a:ea typeface="Times New Roman" pitchFamily="34" charset="-122"/>
                 <a:cs typeface="Times New Roman" pitchFamily="34" charset="-120"/>
               </a:rPr>
-              <a:t>1. Global Trends of Population Change over Time</a:t>
+              <a:t>2. Regional Trends of Population Change</a:t>
             </a:r>
             <a:endParaRPr lang="en-US" sz="3600" dirty="0"/>
           </a:p>
@@ -17971,49 +17767,8 @@
         </p:nvSpPr>
         <p:spPr>
           <a:xfrm>
-            <a:off x="365760" y="1737360"/>
-            <a:ext cx="5120640" cy="457200"/>
-          </a:xfrm>
-          <a:prstGeom prst="rect">
-            <a:avLst/>
-          </a:prstGeom>
-          <a:noFill/>
-          <a:ln/>
-        </p:spPr>
-        <p:txBody>
-          <a:bodyPr wrap="square" lIns="0" tIns="0" rIns="0" bIns="0" rtlCol="0" anchor="ctr">
-            <a:normAutofit/>
-          </a:bodyPr>
-          <a:lstStyle/>
-          <a:p>
-            <a:pPr algn="l" indent="0" marL="0">
-              <a:buNone/>
-            </a:pPr>
-            <a:r>
-              <a:rPr lang="en-US" sz="3000" b="1" dirty="0">
-                <a:solidFill>
-                  <a:srgbClr val="990011"/>
-                </a:solidFill>
-                <a:latin typeface="Times New Roman" pitchFamily="34" charset="0"/>
-                <a:ea typeface="Times New Roman" pitchFamily="34" charset="-122"/>
-                <a:cs typeface="Times New Roman" pitchFamily="34" charset="-120"/>
-              </a:rPr>
-              <a:t>B) The Population Explosion since 1950</a:t>
-            </a:r>
-            <a:endParaRPr lang="en-US" sz="3000" dirty="0"/>
-          </a:p>
-        </p:txBody>
-      </p:sp>
-      <p:sp>
-        <p:nvSpPr>
-          <p:cNvPr id="5" name="Text 3"/>
-          <p:cNvSpPr/>
-          <p:nvPr/>
-        </p:nvSpPr>
-        <p:spPr>
-          <a:xfrm>
-            <a:off x="365760" y="2240280"/>
-            <a:ext cx="4846320" cy="4160520"/>
+            <a:off x="365760" y="1783080"/>
+            <a:ext cx="6035040" cy="4617720"/>
           </a:xfrm>
           <a:prstGeom prst="rect">
             <a:avLst/>
@@ -18032,7 +17787,7 @@
               <a:buNone/>
             </a:pPr>
             <a:r>
-              <a:rPr lang="en-US" sz="3600" b="1" dirty="0">
+              <a:rPr lang="en-US" sz="3000" i="1" dirty="0">
                 <a:solidFill>
                   <a:srgbClr val="111111"/>
                 </a:solidFill>
@@ -18040,8 +17795,11 @@
                 <a:ea typeface="Times New Roman" pitchFamily="34" charset="-122"/>
                 <a:cs typeface="Times New Roman" pitchFamily="34" charset="-120"/>
               </a:rPr>
-              <a:t>Faster and faster: </a:t>
-            </a:r>
+              <a:t>Population changes at different rates in the following groups of countries:</a:t>
+            </a:r>
+            <a:endParaRPr lang="en-US" sz="3000" dirty="0"/>
+          </a:p>
+          <a:p>
             <a:pPr algn="l" indent="0" marL="0">
               <a:spcAft>
                 <a:spcPts val="800"/>
@@ -18049,7 +17807,7 @@
               <a:buNone/>
             </a:pPr>
             <a:r>
-              <a:rPr lang="en-US" sz="3600" dirty="0">
+              <a:rPr lang="en-US" sz="3000" b="1" dirty="0">
                 <a:solidFill>
                   <a:srgbClr val="111111"/>
                 </a:solidFill>
@@ -18057,15 +17815,32 @@
                 <a:ea typeface="Times New Roman" pitchFamily="34" charset="-122"/>
                 <a:cs typeface="Times New Roman" pitchFamily="34" charset="-120"/>
               </a:rPr>
-              <a:t>The second billion took 123 years, but each new billion now takes only about 12 years.</a:t>
-            </a:r>
-            <a:endParaRPr lang="en-US" sz="3600" dirty="0"/>
+              <a:t>Slow change in MEDCs: </a:t>
+            </a:r>
+            <a:pPr algn="l" indent="0" marL="0">
+              <a:spcAft>
+                <a:spcPts val="800"/>
+              </a:spcAft>
+              <a:buNone/>
+            </a:pPr>
+            <a:r>
+              <a:rPr lang="en-US" sz="3000" dirty="0">
+                <a:solidFill>
+                  <a:srgbClr val="111111"/>
+                </a:solidFill>
+                <a:latin typeface="Times New Roman" pitchFamily="34" charset="0"/>
+                <a:ea typeface="Times New Roman" pitchFamily="34" charset="-122"/>
+                <a:cs typeface="Times New Roman" pitchFamily="34" charset="-120"/>
+              </a:rPr>
+              <a:t>In Western Europe, North America and Japan, growth is slow, zero or negative, and the population is ageing. These countries went through their fast growth in the 19th century.</a:t>
+            </a:r>
+            <a:endParaRPr lang="en-US" sz="3000" dirty="0"/>
           </a:p>
         </p:txBody>
       </p:sp>
       <p:pic>
         <p:nvPicPr>
-          <p:cNvPr id="6" name="Image 0" descr="/home/claude/f4/img/v2/pop2_milestones.png">    </p:cNvPr>
+          <p:cNvPr id="5" name="Image 0" descr="/home/claude/f4/img/v2/pop2_medc_ledc.png">    </p:cNvPr>
           <p:cNvPicPr>
             <a:picLocks noChangeAspect="1"/>
           </p:cNvPicPr>
@@ -18079,8 +17854,8 @@
         </p:blipFill>
         <p:spPr>
           <a:xfrm>
-            <a:off x="5349240" y="2461422"/>
-            <a:ext cx="6659575" cy="2913564"/>
+            <a:off x="6537960" y="2849678"/>
+            <a:ext cx="5470855" cy="2137053"/>
           </a:xfrm>
           <a:prstGeom prst="rect">
             <a:avLst/>
@@ -18089,14 +17864,14 @@
       </p:pic>
       <p:sp>
         <p:nvSpPr>
-          <p:cNvPr id="7" name="Text 4"/>
+          <p:cNvPr id="6" name="Text 3"/>
           <p:cNvSpPr/>
           <p:nvPr/>
         </p:nvSpPr>
         <p:spPr>
           <a:xfrm>
-            <a:off x="5349240" y="6089904"/>
-            <a:ext cx="6659575" cy="347472"/>
+            <a:off x="6537960" y="6089904"/>
+            <a:ext cx="5470855" cy="347472"/>
           </a:xfrm>
           <a:prstGeom prst="rect">
             <a:avLst/>
@@ -18120,7 +17895,7 @@
                 <a:ea typeface="Times New Roman" pitchFamily="34" charset="-122"/>
                 <a:cs typeface="Times New Roman" pitchFamily="34" charset="-120"/>
               </a:rPr>
-              <a:t>Illustration: the billions of people</a:t>
+              <a:t>Illustration: MEDCs and LEDCs</a:t>
             </a:r>
             <a:endParaRPr lang="en-US" sz="1600" dirty="0"/>
           </a:p>
@@ -18297,7 +18072,7 @@
                 <a:ea typeface="Times New Roman" pitchFamily="34" charset="-122"/>
                 <a:cs typeface="Times New Roman" pitchFamily="34" charset="-120"/>
               </a:rPr>
-              <a:t>1. Global Trends of Population Change over Time</a:t>
+              <a:t>2. Regional Trends of Population Change</a:t>
             </a:r>
             <a:endParaRPr lang="en-US" sz="3600" dirty="0"/>
           </a:p>
@@ -18311,47 +18086,8 @@
         </p:nvSpPr>
         <p:spPr>
           <a:xfrm>
-            <a:off x="5349240" y="1737360"/>
-            <a:ext cx="6522415" cy="457200"/>
-          </a:xfrm>
-          <a:prstGeom prst="rect">
-            <a:avLst/>
-          </a:prstGeom>
-          <a:noFill/>
-          <a:ln/>
-        </p:spPr>
-        <p:txBody>
-          <a:bodyPr wrap="square" lIns="0" tIns="0" rIns="0" bIns="0" rtlCol="0" anchor="ctr"/>
-          <a:lstStyle/>
-          <a:p>
-            <a:pPr algn="l" indent="0" marL="0">
-              <a:buNone/>
-            </a:pPr>
-            <a:r>
-              <a:rPr lang="en-US" sz="2700" b="1" dirty="0">
-                <a:solidFill>
-                  <a:srgbClr val="990011"/>
-                </a:solidFill>
-                <a:latin typeface="Times New Roman" pitchFamily="34" charset="0"/>
-                <a:ea typeface="Times New Roman" pitchFamily="34" charset="-122"/>
-                <a:cs typeface="Times New Roman" pitchFamily="34" charset="-120"/>
-              </a:rPr>
-              <a:t>B) The Population Explosion since 1950</a:t>
-            </a:r>
-            <a:endParaRPr lang="en-US" sz="2700" dirty="0"/>
-          </a:p>
-        </p:txBody>
-      </p:sp>
-      <p:sp>
-        <p:nvSpPr>
-          <p:cNvPr id="6" name="Text 3"/>
-          <p:cNvSpPr/>
-          <p:nvPr/>
-        </p:nvSpPr>
-        <p:spPr>
-          <a:xfrm>
-            <a:off x="5349240" y="2240280"/>
-            <a:ext cx="6522415" cy="4206240"/>
+            <a:off x="5349240" y="1783080"/>
+            <a:ext cx="6522415" cy="4663440"/>
           </a:xfrm>
           <a:prstGeom prst="rect">
             <a:avLst/>
@@ -18378,7 +18114,7 @@
                 <a:ea typeface="Times New Roman" pitchFamily="34" charset="-122"/>
                 <a:cs typeface="Times New Roman" pitchFamily="34" charset="-120"/>
               </a:rPr>
-              <a:t>Today: </a:t>
+              <a:t>Why MEDCs grow slowly: </a:t>
             </a:r>
             <a:pPr algn="l" indent="0" marL="0">
               <a:spcAft>
@@ -18395,7 +18131,7 @@
                 <a:ea typeface="Times New Roman" pitchFamily="34" charset="-122"/>
                 <a:cs typeface="Times New Roman" pitchFamily="34" charset="-120"/>
               </a:rPr>
-              <a:t>Growth continues, but the growth rate is falling as families become smaller.</a:t>
+              <a:t>Good health care and family planning are available to all. Women study and work, so they marry late and have few children.</a:t>
             </a:r>
             <a:endParaRPr lang="en-US" sz="4000" dirty="0"/>
           </a:p>
@@ -18548,7 +18284,7 @@
                 <a:ea typeface="Times New Roman" pitchFamily="34" charset="-122"/>
                 <a:cs typeface="Times New Roman" pitchFamily="34" charset="-120"/>
               </a:rPr>
-              <a:t>2. Regional Trends: MEDCs and LEDCs</a:t>
+              <a:t>2. Regional Trends of Population Change</a:t>
             </a:r>
             <a:endParaRPr lang="en-US" sz="3600" dirty="0"/>
           </a:p>
@@ -18563,7 +18299,7 @@
         <p:spPr>
           <a:xfrm>
             <a:off x="365760" y="1783080"/>
-            <a:ext cx="4846320" cy="4617720"/>
+            <a:ext cx="6035040" cy="4617720"/>
           </a:xfrm>
           <a:prstGeom prst="rect">
             <a:avLst/>
@@ -18582,7 +18318,7 @@
               <a:buNone/>
             </a:pPr>
             <a:r>
-              <a:rPr lang="en-US" sz="3200" i="1" dirty="0">
+              <a:rPr lang="en-US" sz="3600" b="1" dirty="0">
                 <a:solidFill>
                   <a:srgbClr val="111111"/>
                 </a:solidFill>
@@ -18590,11 +18326,8 @@
                 <a:ea typeface="Times New Roman" pitchFamily="34" charset="-122"/>
                 <a:cs typeface="Times New Roman" pitchFamily="34" charset="-120"/>
               </a:rPr>
-              <a:t>The population trends of MEDCs and LEDCs are the following:</a:t>
-            </a:r>
-            <a:endParaRPr lang="en-US" sz="3200" dirty="0"/>
-          </a:p>
-          <a:p>
+              <a:t>Fast change in LEDCs: </a:t>
+            </a:r>
             <a:pPr algn="l" indent="0" marL="0">
               <a:spcAft>
                 <a:spcPts val="800"/>
@@ -18602,7 +18335,7 @@
               <a:buNone/>
             </a:pPr>
             <a:r>
-              <a:rPr lang="en-US" sz="3200" b="1" dirty="0">
+              <a:rPr lang="en-US" sz="3600" dirty="0">
                 <a:solidFill>
                   <a:srgbClr val="111111"/>
                 </a:solidFill>
@@ -18610,32 +18343,15 @@
                 <a:ea typeface="Times New Roman" pitchFamily="34" charset="-122"/>
                 <a:cs typeface="Times New Roman" pitchFamily="34" charset="-120"/>
               </a:rPr>
-              <a:t>MEDCs: </a:t>
-            </a:r>
-            <a:pPr algn="l" indent="0" marL="0">
-              <a:spcAft>
-                <a:spcPts val="800"/>
-              </a:spcAft>
-              <a:buNone/>
-            </a:pPr>
-            <a:r>
-              <a:rPr lang="en-US" sz="3200" dirty="0">
-                <a:solidFill>
-                  <a:srgbClr val="111111"/>
-                </a:solidFill>
-                <a:latin typeface="Times New Roman" pitchFamily="34" charset="0"/>
-                <a:ea typeface="Times New Roman" pitchFamily="34" charset="-122"/>
-                <a:cs typeface="Times New Roman" pitchFamily="34" charset="-120"/>
-              </a:rPr>
-              <a:t>In Western Europe, North America and Japan, growth is slow, zero or negative, and the population is ageing.</a:t>
-            </a:r>
-            <a:endParaRPr lang="en-US" sz="3200" dirty="0"/>
+              <a:t>In sub-Saharan Africa, such as Cameroon, Nigeria and Chad, and in South Asia, growth is rapid and the population is very young. Africa is now the fastest-growing continent.</a:t>
+            </a:r>
+            <a:endParaRPr lang="en-US" sz="3600" dirty="0"/>
           </a:p>
         </p:txBody>
       </p:sp>
       <p:pic>
         <p:nvPicPr>
-          <p:cNvPr id="5" name="Image 0" descr="/home/claude/f4/img/v2/pop2_medc_ledc.png">    </p:cNvPr>
+          <p:cNvPr id="5" name="Image 0" descr="/home/claude/f4/img/v2/regional_growth_big.png">    </p:cNvPr>
           <p:cNvPicPr>
             <a:picLocks noChangeAspect="1"/>
           </p:cNvPicPr>
@@ -18649,8 +18365,8 @@
         </p:blipFill>
         <p:spPr>
           <a:xfrm>
-            <a:off x="5349240" y="2617506"/>
-            <a:ext cx="6659575" cy="2601397"/>
+            <a:off x="6537960" y="2721454"/>
+            <a:ext cx="5470855" cy="2393499"/>
           </a:xfrm>
           <a:prstGeom prst="rect">
             <a:avLst/>
@@ -18665,8 +18381,8 @@
         </p:nvSpPr>
         <p:spPr>
           <a:xfrm>
-            <a:off x="5349240" y="6089904"/>
-            <a:ext cx="6659575" cy="347472"/>
+            <a:off x="6537960" y="6089904"/>
+            <a:ext cx="5470855" cy="347472"/>
           </a:xfrm>
           <a:prstGeom prst="rect">
             <a:avLst/>
@@ -18690,7 +18406,7 @@
                 <a:ea typeface="Times New Roman" pitchFamily="34" charset="-122"/>
                 <a:cs typeface="Times New Roman" pitchFamily="34" charset="-120"/>
               </a:rPr>
-              <a:t>Illustration: MEDCs and LEDCs</a:t>
+              <a:t>Illustration: regional growth</a:t>
             </a:r>
             <a:endParaRPr lang="en-US" sz="1600" dirty="0"/>
           </a:p>
@@ -18867,7 +18583,7 @@
                 <a:ea typeface="Times New Roman" pitchFamily="34" charset="-122"/>
                 <a:cs typeface="Times New Roman" pitchFamily="34" charset="-120"/>
               </a:rPr>
-              <a:t>2. Regional Trends: MEDCs and LEDCs</a:t>
+              <a:t>2. Regional Trends of Population Change</a:t>
             </a:r>
             <a:endParaRPr lang="en-US" sz="3600" dirty="0"/>
           </a:p>
@@ -18909,7 +18625,7 @@
                 <a:ea typeface="Times New Roman" pitchFamily="34" charset="-122"/>
                 <a:cs typeface="Times New Roman" pitchFamily="34" charset="-120"/>
               </a:rPr>
-              <a:t>Why MEDCs grow slowly: </a:t>
+              <a:t>Why LEDCs grow fast: </a:t>
             </a:r>
             <a:pPr algn="l" indent="0" marL="0">
               <a:spcAft>
@@ -18926,7 +18642,7 @@
                 <a:ea typeface="Times New Roman" pitchFamily="34" charset="-122"/>
                 <a:cs typeface="Times New Roman" pitchFamily="34" charset="-120"/>
               </a:rPr>
-              <a:t>Good health care and family planning, and women who study and work, lead to late marriages and few children.</a:t>
+              <a:t>Deaths have fallen thanks to vaccination and malaria treatment, but births remain high. Large families are still valued, especially in rural areas.</a:t>
             </a:r>
             <a:endParaRPr lang="en-US" sz="4000" dirty="0"/>
           </a:p>
@@ -19044,109 +18760,9 @@
           </a:p>
         </p:txBody>
       </p:sp>
-      <p:sp>
-        <p:nvSpPr>
-          <p:cNvPr id="3" name="Text 1"/>
-          <p:cNvSpPr/>
-          <p:nvPr/>
-        </p:nvSpPr>
-        <p:spPr>
-          <a:xfrm>
-            <a:off x="365760" y="1005840"/>
-            <a:ext cx="11460175" cy="731520"/>
-          </a:xfrm>
-          <a:prstGeom prst="rect">
-            <a:avLst/>
-          </a:prstGeom>
-          <a:noFill/>
-          <a:ln/>
-        </p:spPr>
-        <p:txBody>
-          <a:bodyPr wrap="square" lIns="0" tIns="0" rIns="0" bIns="0" rtlCol="0" anchor="ctr">
-            <a:normAutofit/>
-          </a:bodyPr>
-          <a:lstStyle/>
-          <a:p>
-            <a:pPr algn="ctr" indent="0" marL="0">
-              <a:buNone/>
-            </a:pPr>
-            <a:r>
-              <a:rPr lang="en-US" sz="3600" b="1" dirty="0">
-                <a:solidFill>
-                  <a:srgbClr val="990011"/>
-                </a:solidFill>
-                <a:latin typeface="Times New Roman" pitchFamily="34" charset="0"/>
-                <a:ea typeface="Times New Roman" pitchFamily="34" charset="-122"/>
-                <a:cs typeface="Times New Roman" pitchFamily="34" charset="-120"/>
-              </a:rPr>
-              <a:t>2. Regional Trends: MEDCs and LEDCs</a:t>
-            </a:r>
-            <a:endParaRPr lang="en-US" sz="3600" dirty="0"/>
-          </a:p>
-        </p:txBody>
-      </p:sp>
-      <p:sp>
-        <p:nvSpPr>
-          <p:cNvPr id="4" name="Text 2"/>
-          <p:cNvSpPr/>
-          <p:nvPr/>
-        </p:nvSpPr>
-        <p:spPr>
-          <a:xfrm>
-            <a:off x="365760" y="1783080"/>
-            <a:ext cx="4846320" cy="4617720"/>
-          </a:xfrm>
-          <a:prstGeom prst="rect">
-            <a:avLst/>
-          </a:prstGeom>
-          <a:noFill/>
-          <a:ln/>
-        </p:spPr>
-        <p:txBody>
-          <a:bodyPr wrap="square" lIns="0" tIns="0" rIns="0" bIns="0" rtlCol="0" anchor="t"/>
-          <a:lstStyle/>
-          <a:p>
-            <a:pPr algn="l" indent="0" marL="0">
-              <a:spcAft>
-                <a:spcPts val="800"/>
-              </a:spcAft>
-              <a:buNone/>
-            </a:pPr>
-            <a:r>
-              <a:rPr lang="en-US" sz="3600" b="1" dirty="0">
-                <a:solidFill>
-                  <a:srgbClr val="111111"/>
-                </a:solidFill>
-                <a:latin typeface="Times New Roman" pitchFamily="34" charset="0"/>
-                <a:ea typeface="Times New Roman" pitchFamily="34" charset="-122"/>
-                <a:cs typeface="Times New Roman" pitchFamily="34" charset="-120"/>
-              </a:rPr>
-              <a:t>LEDCs: </a:t>
-            </a:r>
-            <a:pPr algn="l" indent="0" marL="0">
-              <a:spcAft>
-                <a:spcPts val="800"/>
-              </a:spcAft>
-              <a:buNone/>
-            </a:pPr>
-            <a:r>
-              <a:rPr lang="en-US" sz="3600" dirty="0">
-                <a:solidFill>
-                  <a:srgbClr val="111111"/>
-                </a:solidFill>
-                <a:latin typeface="Times New Roman" pitchFamily="34" charset="0"/>
-                <a:ea typeface="Times New Roman" pitchFamily="34" charset="-122"/>
-                <a:cs typeface="Times New Roman" pitchFamily="34" charset="-120"/>
-              </a:rPr>
-              <a:t>In sub-Saharan Africa (Cameroon, Nigeria, Chad) and South Asia, growth is rapid and the population is very young.</a:t>
-            </a:r>
-            <a:endParaRPr lang="en-US" sz="3600" dirty="0"/>
-          </a:p>
-        </p:txBody>
-      </p:sp>
       <p:pic>
         <p:nvPicPr>
-          <p:cNvPr id="5" name="Image 0" descr="/home/claude/f4/img/v2/regional_growth_big.png">    </p:cNvPr>
+          <p:cNvPr id="3" name="Image 0" descr="/home/claude/f4/img/minesec_sheet.png">    </p:cNvPr>
           <p:cNvPicPr>
             <a:picLocks noChangeAspect="1"/>
           </p:cNvPicPr>
@@ -19160,8 +18776,8 @@
         </p:blipFill>
         <p:spPr>
           <a:xfrm>
-            <a:off x="5349240" y="2461422"/>
-            <a:ext cx="6659575" cy="2913564"/>
+            <a:off x="0" y="658368"/>
+            <a:ext cx="2468880" cy="5833872"/>
           </a:xfrm>
           <a:prstGeom prst="rect">
             <a:avLst/>
@@ -19170,14 +18786,14 @@
       </p:pic>
       <p:sp>
         <p:nvSpPr>
-          <p:cNvPr id="6" name="Text 3"/>
+          <p:cNvPr id="4" name="Text 1"/>
           <p:cNvSpPr/>
           <p:nvPr/>
         </p:nvSpPr>
         <p:spPr>
           <a:xfrm>
-            <a:off x="5349240" y="6089904"/>
-            <a:ext cx="6659575" cy="347472"/>
+            <a:off x="2697480" y="1005840"/>
+            <a:ext cx="9174175" cy="731520"/>
           </a:xfrm>
           <a:prstGeom prst="rect">
             <a:avLst/>
@@ -19186,24 +18802,105 @@
           <a:ln/>
         </p:spPr>
         <p:txBody>
-          <a:bodyPr wrap="square" lIns="0" tIns="0" rIns="0" bIns="0" rtlCol="0" anchor="ctr"/>
+          <a:bodyPr wrap="square" lIns="0" tIns="0" rIns="0" bIns="0" rtlCol="0" anchor="ctr">
+            <a:normAutofit/>
+          </a:bodyPr>
           <a:lstStyle/>
           <a:p>
             <a:pPr algn="ctr" indent="0" marL="0">
               <a:buNone/>
             </a:pPr>
             <a:r>
-              <a:rPr lang="en-US" sz="1600" i="1" dirty="0">
-                <a:solidFill>
-                  <a:srgbClr val="555555"/>
+              <a:rPr lang="en-US" sz="3600" b="1" dirty="0">
+                <a:solidFill>
+                  <a:srgbClr val="990011"/>
                 </a:solidFill>
                 <a:latin typeface="Times New Roman" pitchFamily="34" charset="0"/>
                 <a:ea typeface="Times New Roman" pitchFamily="34" charset="-122"/>
                 <a:cs typeface="Times New Roman" pitchFamily="34" charset="-120"/>
               </a:rPr>
-              <a:t>Illustration: growth of LEDCs and MEDCs</a:t>
-            </a:r>
-            <a:endParaRPr lang="en-US" sz="1600" dirty="0"/>
+              <a:t>3. Reasons for the Differences in Rates of Change</a:t>
+            </a:r>
+            <a:endParaRPr lang="en-US" sz="3600" dirty="0"/>
+          </a:p>
+        </p:txBody>
+      </p:sp>
+      <p:sp>
+        <p:nvSpPr>
+          <p:cNvPr id="5" name="Text 2"/>
+          <p:cNvSpPr/>
+          <p:nvPr/>
+        </p:nvSpPr>
+        <p:spPr>
+          <a:xfrm>
+            <a:off x="2697480" y="1783080"/>
+            <a:ext cx="9174175" cy="4663440"/>
+          </a:xfrm>
+          <a:prstGeom prst="rect">
+            <a:avLst/>
+          </a:prstGeom>
+          <a:noFill/>
+          <a:ln/>
+        </p:spPr>
+        <p:txBody>
+          <a:bodyPr wrap="square" lIns="0" tIns="0" rIns="0" bIns="0" rtlCol="0" anchor="t"/>
+          <a:lstStyle/>
+          <a:p>
+            <a:pPr algn="l" indent="0" marL="0">
+              <a:spcAft>
+                <a:spcPts val="800"/>
+              </a:spcAft>
+              <a:buNone/>
+            </a:pPr>
+            <a:r>
+              <a:rPr lang="en-US" sz="4000" i="1" dirty="0">
+                <a:solidFill>
+                  <a:srgbClr val="111111"/>
+                </a:solidFill>
+                <a:latin typeface="Times New Roman" pitchFamily="34" charset="0"/>
+                <a:ea typeface="Times New Roman" pitchFamily="34" charset="-122"/>
+                <a:cs typeface="Times New Roman" pitchFamily="34" charset="-120"/>
+              </a:rPr>
+              <a:t>The rates of change differ between parts of the world for the following reasons:</a:t>
+            </a:r>
+            <a:endParaRPr lang="en-US" sz="4000" dirty="0"/>
+          </a:p>
+          <a:p>
+            <a:pPr algn="l" indent="0" marL="0">
+              <a:spcAft>
+                <a:spcPts val="800"/>
+              </a:spcAft>
+              <a:buNone/>
+            </a:pPr>
+            <a:r>
+              <a:rPr lang="en-US" sz="4000" b="1" dirty="0">
+                <a:solidFill>
+                  <a:srgbClr val="111111"/>
+                </a:solidFill>
+                <a:latin typeface="Times New Roman" pitchFamily="34" charset="0"/>
+                <a:ea typeface="Times New Roman" pitchFamily="34" charset="-122"/>
+                <a:cs typeface="Times New Roman" pitchFamily="34" charset="-120"/>
+              </a:rPr>
+              <a:t>Economic development: </a:t>
+            </a:r>
+            <a:pPr algn="l" indent="0" marL="0">
+              <a:spcAft>
+                <a:spcPts val="800"/>
+              </a:spcAft>
+              <a:buNone/>
+            </a:pPr>
+            <a:r>
+              <a:rPr lang="en-US" sz="4000" dirty="0">
+                <a:solidFill>
+                  <a:srgbClr val="111111"/>
+                </a:solidFill>
+                <a:latin typeface="Times New Roman" pitchFamily="34" charset="0"/>
+                <a:ea typeface="Times New Roman" pitchFamily="34" charset="-122"/>
+                <a:cs typeface="Times New Roman" pitchFamily="34" charset="-120"/>
+              </a:rPr>
+              <a:t>In rich countries, children are expensive to raise and educate. In poor rural areas, they help on the farm and support their parents in old age.</a:t>
+            </a:r>
+            <a:endParaRPr lang="en-US" sz="4000" dirty="0"/>
           </a:p>
         </p:txBody>
       </p:sp>
@@ -19555,7 +19252,7 @@
         <p:spPr>
           <a:xfrm>
             <a:off x="0" y="658368"/>
-            <a:ext cx="5120640" cy="5833872"/>
+            <a:ext cx="3840480" cy="5833872"/>
           </a:xfrm>
           <a:prstGeom prst="rect">
             <a:avLst/>
@@ -19570,8 +19267,8 @@
         </p:nvSpPr>
         <p:spPr>
           <a:xfrm>
-            <a:off x="5349240" y="1005840"/>
-            <a:ext cx="6522415" cy="731520"/>
+            <a:off x="4069080" y="1005840"/>
+            <a:ext cx="7802575" cy="731520"/>
           </a:xfrm>
           <a:prstGeom prst="rect">
             <a:avLst/>
@@ -19597,7 +19294,7 @@
                 <a:ea typeface="Times New Roman" pitchFamily="34" charset="-122"/>
                 <a:cs typeface="Times New Roman" pitchFamily="34" charset="-120"/>
               </a:rPr>
-              <a:t>2. Regional Trends: MEDCs and LEDCs</a:t>
+              <a:t>3. Reasons for the Differences in Rates of Change</a:t>
             </a:r>
             <a:endParaRPr lang="en-US" sz="3600" dirty="0"/>
           </a:p>
@@ -19611,8 +19308,8 @@
         </p:nvSpPr>
         <p:spPr>
           <a:xfrm>
-            <a:off x="5349240" y="1783080"/>
-            <a:ext cx="6522415" cy="4663440"/>
+            <a:off x="4069080" y="1783080"/>
+            <a:ext cx="7802575" cy="4663440"/>
           </a:xfrm>
           <a:prstGeom prst="rect">
             <a:avLst/>
@@ -19639,7 +19336,7 @@
                 <a:ea typeface="Times New Roman" pitchFamily="34" charset="-122"/>
                 <a:cs typeface="Times New Roman" pitchFamily="34" charset="-120"/>
               </a:rPr>
-              <a:t>Why LEDCs grow fast: </a:t>
+              <a:t>Social and cultural norms: </a:t>
             </a:r>
             <a:pPr algn="l" indent="0" marL="0">
               <a:spcAft>
@@ -19656,7 +19353,7 @@
                 <a:ea typeface="Times New Roman" pitchFamily="34" charset="-122"/>
                 <a:cs typeface="Times New Roman" pitchFamily="34" charset="-120"/>
               </a:rPr>
-              <a:t>Large families are valued, and deaths have fallen thanks to vaccination and malaria treatment.</a:t>
+              <a:t>In many African and Asian societies, a large family is a sign of wealth and prestige. Early marriage also lengthens the period during which women have children.</a:t>
             </a:r>
             <a:endParaRPr lang="en-US" sz="4000" dirty="0"/>
           </a:p>
@@ -19774,9 +19471,109 @@
           </a:p>
         </p:txBody>
       </p:sp>
+      <p:sp>
+        <p:nvSpPr>
+          <p:cNvPr id="3" name="Text 1"/>
+          <p:cNvSpPr/>
+          <p:nvPr/>
+        </p:nvSpPr>
+        <p:spPr>
+          <a:xfrm>
+            <a:off x="365760" y="1005840"/>
+            <a:ext cx="11460175" cy="731520"/>
+          </a:xfrm>
+          <a:prstGeom prst="rect">
+            <a:avLst/>
+          </a:prstGeom>
+          <a:noFill/>
+          <a:ln/>
+        </p:spPr>
+        <p:txBody>
+          <a:bodyPr wrap="square" lIns="0" tIns="0" rIns="0" bIns="0" rtlCol="0" anchor="ctr">
+            <a:normAutofit/>
+          </a:bodyPr>
+          <a:lstStyle/>
+          <a:p>
+            <a:pPr algn="ctr" indent="0" marL="0">
+              <a:buNone/>
+            </a:pPr>
+            <a:r>
+              <a:rPr lang="en-US" sz="3600" b="1" dirty="0">
+                <a:solidFill>
+                  <a:srgbClr val="990011"/>
+                </a:solidFill>
+                <a:latin typeface="Times New Roman" pitchFamily="34" charset="0"/>
+                <a:ea typeface="Times New Roman" pitchFamily="34" charset="-122"/>
+                <a:cs typeface="Times New Roman" pitchFamily="34" charset="-120"/>
+              </a:rPr>
+              <a:t>3. Reasons for the Differences in Rates of Change</a:t>
+            </a:r>
+            <a:endParaRPr lang="en-US" sz="3600" dirty="0"/>
+          </a:p>
+        </p:txBody>
+      </p:sp>
+      <p:sp>
+        <p:nvSpPr>
+          <p:cNvPr id="4" name="Text 2"/>
+          <p:cNvSpPr/>
+          <p:nvPr/>
+        </p:nvSpPr>
+        <p:spPr>
+          <a:xfrm>
+            <a:off x="365760" y="1783080"/>
+            <a:ext cx="6035040" cy="4617720"/>
+          </a:xfrm>
+          <a:prstGeom prst="rect">
+            <a:avLst/>
+          </a:prstGeom>
+          <a:noFill/>
+          <a:ln/>
+        </p:spPr>
+        <p:txBody>
+          <a:bodyPr wrap="square" lIns="0" tIns="0" rIns="0" bIns="0" rtlCol="0" anchor="t"/>
+          <a:lstStyle/>
+          <a:p>
+            <a:pPr algn="l" indent="0" marL="0">
+              <a:spcAft>
+                <a:spcPts val="800"/>
+              </a:spcAft>
+              <a:buNone/>
+            </a:pPr>
+            <a:r>
+              <a:rPr lang="en-US" sz="3600" b="1" dirty="0">
+                <a:solidFill>
+                  <a:srgbClr val="111111"/>
+                </a:solidFill>
+                <a:latin typeface="Times New Roman" pitchFamily="34" charset="0"/>
+                <a:ea typeface="Times New Roman" pitchFamily="34" charset="-122"/>
+                <a:cs typeface="Times New Roman" pitchFamily="34" charset="-120"/>
+              </a:rPr>
+              <a:t>Education of women: </a:t>
+            </a:r>
+            <a:pPr algn="l" indent="0" marL="0">
+              <a:spcAft>
+                <a:spcPts val="800"/>
+              </a:spcAft>
+              <a:buNone/>
+            </a:pPr>
+            <a:r>
+              <a:rPr lang="en-US" sz="3600" dirty="0">
+                <a:solidFill>
+                  <a:srgbClr val="111111"/>
+                </a:solidFill>
+                <a:latin typeface="Times New Roman" pitchFamily="34" charset="0"/>
+                <a:ea typeface="Times New Roman" pitchFamily="34" charset="-122"/>
+                <a:cs typeface="Times New Roman" pitchFamily="34" charset="-120"/>
+              </a:rPr>
+              <a:t>It is the most important factor, because educated women marry later and have fewer children. They also know more about health and family planning.</a:t>
+            </a:r>
+            <a:endParaRPr lang="en-US" sz="3600" dirty="0"/>
+          </a:p>
+        </p:txBody>
+      </p:sp>
       <p:pic>
         <p:nvPicPr>
-          <p:cNvPr id="3" name="Image 0" descr="/home/claude/f4/img/minesec_sheet.png">    </p:cNvPr>
+          <p:cNvPr id="5" name="Image 0" descr="/home/claude/f4/img/v2/usa_girls.jpg">    </p:cNvPr>
           <p:cNvPicPr>
             <a:picLocks noChangeAspect="1"/>
           </p:cNvPicPr>
@@ -19790,8 +19587,8 @@
         </p:blipFill>
         <p:spPr>
           <a:xfrm>
-            <a:off x="0" y="658368"/>
-            <a:ext cx="2468880" cy="5833872"/>
+            <a:off x="6537960" y="2400897"/>
+            <a:ext cx="5470855" cy="3034615"/>
           </a:xfrm>
           <a:prstGeom prst="rect">
             <a:avLst/>
@@ -19800,14 +19597,14 @@
       </p:pic>
       <p:sp>
         <p:nvSpPr>
-          <p:cNvPr id="4" name="Text 1"/>
+          <p:cNvPr id="6" name="Text 3"/>
           <p:cNvSpPr/>
           <p:nvPr/>
         </p:nvSpPr>
         <p:spPr>
           <a:xfrm>
-            <a:off x="2697480" y="1005840"/>
-            <a:ext cx="9174175" cy="731520"/>
+            <a:off x="6537960" y="6089904"/>
+            <a:ext cx="5470855" cy="347472"/>
           </a:xfrm>
           <a:prstGeom prst="rect">
             <a:avLst/>
@@ -19816,105 +19613,24 @@
           <a:ln/>
         </p:spPr>
         <p:txBody>
-          <a:bodyPr wrap="square" lIns="0" tIns="0" rIns="0" bIns="0" rtlCol="0" anchor="ctr">
-            <a:normAutofit/>
-          </a:bodyPr>
+          <a:bodyPr wrap="square" lIns="0" tIns="0" rIns="0" bIns="0" rtlCol="0" anchor="ctr"/>
           <a:lstStyle/>
           <a:p>
             <a:pPr algn="ctr" indent="0" marL="0">
               <a:buNone/>
             </a:pPr>
             <a:r>
-              <a:rPr lang="en-US" sz="3600" b="1" dirty="0">
-                <a:solidFill>
-                  <a:srgbClr val="990011"/>
+              <a:rPr lang="en-US" sz="1600" i="1" dirty="0">
+                <a:solidFill>
+                  <a:srgbClr val="555555"/>
                 </a:solidFill>
                 <a:latin typeface="Times New Roman" pitchFamily="34" charset="0"/>
                 <a:ea typeface="Times New Roman" pitchFamily="34" charset="-122"/>
                 <a:cs typeface="Times New Roman" pitchFamily="34" charset="-120"/>
               </a:rPr>
-              <a:t>3. Factors of Regional Differences</a:t>
-            </a:r>
-            <a:endParaRPr lang="en-US" sz="3600" dirty="0"/>
-          </a:p>
-        </p:txBody>
-      </p:sp>
-      <p:sp>
-        <p:nvSpPr>
-          <p:cNvPr id="5" name="Text 2"/>
-          <p:cNvSpPr/>
-          <p:nvPr/>
-        </p:nvSpPr>
-        <p:spPr>
-          <a:xfrm>
-            <a:off x="2697480" y="1783080"/>
-            <a:ext cx="9174175" cy="4663440"/>
-          </a:xfrm>
-          <a:prstGeom prst="rect">
-            <a:avLst/>
-          </a:prstGeom>
-          <a:noFill/>
-          <a:ln/>
-        </p:spPr>
-        <p:txBody>
-          <a:bodyPr wrap="square" lIns="0" tIns="0" rIns="0" bIns="0" rtlCol="0" anchor="t"/>
-          <a:lstStyle/>
-          <a:p>
-            <a:pPr algn="l" indent="0" marL="0">
-              <a:spcAft>
-                <a:spcPts val="800"/>
-              </a:spcAft>
-              <a:buNone/>
-            </a:pPr>
-            <a:r>
-              <a:rPr lang="en-US" sz="4000" i="1" dirty="0">
-                <a:solidFill>
-                  <a:srgbClr val="111111"/>
-                </a:solidFill>
-                <a:latin typeface="Times New Roman" pitchFamily="34" charset="0"/>
-                <a:ea typeface="Times New Roman" pitchFamily="34" charset="-122"/>
-                <a:cs typeface="Times New Roman" pitchFamily="34" charset="-120"/>
-              </a:rPr>
-              <a:t>The factors of regional differences in growth are the following:</a:t>
-            </a:r>
-            <a:endParaRPr lang="en-US" sz="4000" dirty="0"/>
-          </a:p>
-          <a:p>
-            <a:pPr algn="l" indent="0" marL="0">
-              <a:spcAft>
-                <a:spcPts val="800"/>
-              </a:spcAft>
-              <a:buNone/>
-            </a:pPr>
-            <a:r>
-              <a:rPr lang="en-US" sz="4000" b="1" dirty="0">
-                <a:solidFill>
-                  <a:srgbClr val="111111"/>
-                </a:solidFill>
-                <a:latin typeface="Times New Roman" pitchFamily="34" charset="0"/>
-                <a:ea typeface="Times New Roman" pitchFamily="34" charset="-122"/>
-                <a:cs typeface="Times New Roman" pitchFamily="34" charset="-120"/>
-              </a:rPr>
-              <a:t>Economic development: </a:t>
-            </a:r>
-            <a:pPr algn="l" indent="0" marL="0">
-              <a:spcAft>
-                <a:spcPts val="800"/>
-              </a:spcAft>
-              <a:buNone/>
-            </a:pPr>
-            <a:r>
-              <a:rPr lang="en-US" sz="4000" dirty="0">
-                <a:solidFill>
-                  <a:srgbClr val="111111"/>
-                </a:solidFill>
-                <a:latin typeface="Times New Roman" pitchFamily="34" charset="0"/>
-                <a:ea typeface="Times New Roman" pitchFamily="34" charset="-122"/>
-                <a:cs typeface="Times New Roman" pitchFamily="34" charset="-120"/>
-              </a:rPr>
-              <a:t>In rich countries children are expensive, while in poor rural areas they help on the farm and support parents in old age.</a:t>
-            </a:r>
-            <a:endParaRPr lang="en-US" sz="4000" dirty="0"/>
+              <a:t>Illustration: girls at school</a:t>
+            </a:r>
+            <a:endParaRPr lang="en-US" sz="1600" dirty="0"/>
           </a:p>
         </p:txBody>
       </p:sp>
@@ -20089,7 +19805,7 @@
                 <a:ea typeface="Times New Roman" pitchFamily="34" charset="-122"/>
                 <a:cs typeface="Times New Roman" pitchFamily="34" charset="-120"/>
               </a:rPr>
-              <a:t>3. Factors of Regional Differences (continued)</a:t>
+              <a:t>3. Reasons for the Differences in Rates of Change</a:t>
             </a:r>
             <a:endParaRPr lang="en-US" sz="3600" dirty="0"/>
           </a:p>
@@ -20131,7 +19847,7 @@
                 <a:ea typeface="Times New Roman" pitchFamily="34" charset="-122"/>
                 <a:cs typeface="Times New Roman" pitchFamily="34" charset="-120"/>
               </a:rPr>
-              <a:t>Social and cultural norms: </a:t>
+              <a:t>Government policies: </a:t>
             </a:r>
             <a:pPr algn="l" indent="0" marL="0">
               <a:spcAft>
@@ -20148,7 +19864,7 @@
                 <a:ea typeface="Times New Roman" pitchFamily="34" charset="-122"/>
                 <a:cs typeface="Times New Roman" pitchFamily="34" charset="-120"/>
               </a:rPr>
-              <a:t>In many African and Asian societies, a large family is a sign of wealth and prestige.</a:t>
+              <a:t>Pro-natalist policies encourage births, as in France and Russia. Anti-natalist policies limit births, as in China between about 1980 and 2015.</a:t>
             </a:r>
             <a:endParaRPr lang="en-US" sz="4000" dirty="0"/>
           </a:p>
@@ -20260,115 +19976,15 @@
                 <a:ea typeface="Calibri" pitchFamily="34" charset="-122"/>
                 <a:cs typeface="Calibri" pitchFamily="34" charset="-120"/>
               </a:rPr>
-              <a:t>BOARD SUMMARY</a:t>
+              <a:t>FORMATIVE EVALUATION</a:t>
             </a:r>
             <a:endParaRPr lang="en-US" sz="1400" dirty="0"/>
-          </a:p>
-        </p:txBody>
-      </p:sp>
-      <p:sp>
-        <p:nvSpPr>
-          <p:cNvPr id="3" name="Text 1"/>
-          <p:cNvSpPr/>
-          <p:nvPr/>
-        </p:nvSpPr>
-        <p:spPr>
-          <a:xfrm>
-            <a:off x="365760" y="1005840"/>
-            <a:ext cx="11460175" cy="731520"/>
-          </a:xfrm>
-          <a:prstGeom prst="rect">
-            <a:avLst/>
-          </a:prstGeom>
-          <a:noFill/>
-          <a:ln/>
-        </p:spPr>
-        <p:txBody>
-          <a:bodyPr wrap="square" lIns="0" tIns="0" rIns="0" bIns="0" rtlCol="0" anchor="ctr">
-            <a:normAutofit/>
-          </a:bodyPr>
-          <a:lstStyle/>
-          <a:p>
-            <a:pPr algn="ctr" indent="0" marL="0">
-              <a:buNone/>
-            </a:pPr>
-            <a:r>
-              <a:rPr lang="en-US" sz="3600" b="1" dirty="0">
-                <a:solidFill>
-                  <a:srgbClr val="990011"/>
-                </a:solidFill>
-                <a:latin typeface="Times New Roman" pitchFamily="34" charset="0"/>
-                <a:ea typeface="Times New Roman" pitchFamily="34" charset="-122"/>
-                <a:cs typeface="Times New Roman" pitchFamily="34" charset="-120"/>
-              </a:rPr>
-              <a:t>3. Factors of Regional Differences</a:t>
-            </a:r>
-            <a:endParaRPr lang="en-US" sz="3600" dirty="0"/>
-          </a:p>
-        </p:txBody>
-      </p:sp>
-      <p:sp>
-        <p:nvSpPr>
-          <p:cNvPr id="4" name="Text 2"/>
-          <p:cNvSpPr/>
-          <p:nvPr/>
-        </p:nvSpPr>
-        <p:spPr>
-          <a:xfrm>
-            <a:off x="365760" y="1783080"/>
-            <a:ext cx="4846320" cy="4617720"/>
-          </a:xfrm>
-          <a:prstGeom prst="rect">
-            <a:avLst/>
-          </a:prstGeom>
-          <a:noFill/>
-          <a:ln/>
-        </p:spPr>
-        <p:txBody>
-          <a:bodyPr wrap="square" lIns="0" tIns="0" rIns="0" bIns="0" rtlCol="0" anchor="t"/>
-          <a:lstStyle/>
-          <a:p>
-            <a:pPr algn="l" indent="0" marL="0">
-              <a:spcAft>
-                <a:spcPts val="800"/>
-              </a:spcAft>
-              <a:buNone/>
-            </a:pPr>
-            <a:r>
-              <a:rPr lang="en-US" sz="3600" b="1" dirty="0">
-                <a:solidFill>
-                  <a:srgbClr val="111111"/>
-                </a:solidFill>
-                <a:latin typeface="Times New Roman" pitchFamily="34" charset="0"/>
-                <a:ea typeface="Times New Roman" pitchFamily="34" charset="-122"/>
-                <a:cs typeface="Times New Roman" pitchFamily="34" charset="-120"/>
-              </a:rPr>
-              <a:t>Education of women: </a:t>
-            </a:r>
-            <a:pPr algn="l" indent="0" marL="0">
-              <a:spcAft>
-                <a:spcPts val="800"/>
-              </a:spcAft>
-              <a:buNone/>
-            </a:pPr>
-            <a:r>
-              <a:rPr lang="en-US" sz="3600" dirty="0">
-                <a:solidFill>
-                  <a:srgbClr val="111111"/>
-                </a:solidFill>
-                <a:latin typeface="Times New Roman" pitchFamily="34" charset="0"/>
-                <a:ea typeface="Times New Roman" pitchFamily="34" charset="-122"/>
-                <a:cs typeface="Times New Roman" pitchFamily="34" charset="-120"/>
-              </a:rPr>
-              <a:t>It is the most important factor: educated women marry later and have fewer children.</a:t>
-            </a:r>
-            <a:endParaRPr lang="en-US" sz="3600" dirty="0"/>
           </a:p>
         </p:txBody>
       </p:sp>
       <p:pic>
         <p:nvPicPr>
-          <p:cNvPr id="5" name="Image 0" descr="/home/claude/f4/img/v2/usa_girls.jpg">    </p:cNvPr>
+          <p:cNvPr id="3" name="Image 0" descr="/home/claude/f4/img/minesec_sheet.png">    </p:cNvPr>
           <p:cNvPicPr>
             <a:picLocks noChangeAspect="1"/>
           </p:cNvPicPr>
@@ -20382,8 +19998,8 @@
         </p:blipFill>
         <p:spPr>
           <a:xfrm>
-            <a:off x="5349240" y="2071212"/>
-            <a:ext cx="6659575" cy="3693983"/>
+            <a:off x="0" y="658368"/>
+            <a:ext cx="5120640" cy="5833872"/>
           </a:xfrm>
           <a:prstGeom prst="rect">
             <a:avLst/>
@@ -20392,14 +20008,14 @@
       </p:pic>
       <p:sp>
         <p:nvSpPr>
-          <p:cNvPr id="6" name="Text 3"/>
+          <p:cNvPr id="4" name="Text 1"/>
           <p:cNvSpPr/>
           <p:nvPr/>
         </p:nvSpPr>
         <p:spPr>
           <a:xfrm>
-            <a:off x="5349240" y="6089904"/>
-            <a:ext cx="6659575" cy="347472"/>
+            <a:off x="5349240" y="1005840"/>
+            <a:ext cx="6522415" cy="731520"/>
           </a:xfrm>
           <a:prstGeom prst="rect">
             <a:avLst/>
@@ -20408,24 +20024,68 @@
           <a:ln/>
         </p:spPr>
         <p:txBody>
-          <a:bodyPr wrap="square" lIns="0" tIns="0" rIns="0" bIns="0" rtlCol="0" anchor="ctr"/>
+          <a:bodyPr wrap="square" lIns="0" tIns="0" rIns="0" bIns="0" rtlCol="0" anchor="ctr">
+            <a:normAutofit/>
+          </a:bodyPr>
           <a:lstStyle/>
           <a:p>
             <a:pPr algn="ctr" indent="0" marL="0">
               <a:buNone/>
             </a:pPr>
             <a:r>
-              <a:rPr lang="en-US" sz="1600" i="1" dirty="0">
-                <a:solidFill>
-                  <a:srgbClr val="555555"/>
+              <a:rPr lang="en-US" sz="3600" b="1" dirty="0">
+                <a:solidFill>
+                  <a:srgbClr val="990011"/>
                 </a:solidFill>
                 <a:latin typeface="Times New Roman" pitchFamily="34" charset="0"/>
                 <a:ea typeface="Times New Roman" pitchFamily="34" charset="-122"/>
                 <a:cs typeface="Times New Roman" pitchFamily="34" charset="-120"/>
               </a:rPr>
-              <a:t>Illustration: girls at school</a:t>
-            </a:r>
-            <a:endParaRPr lang="en-US" sz="1600" dirty="0"/>
+              <a:t>Evaluation 1</a:t>
+            </a:r>
+            <a:endParaRPr lang="en-US" sz="3600" dirty="0"/>
+          </a:p>
+        </p:txBody>
+      </p:sp>
+      <p:sp>
+        <p:nvSpPr>
+          <p:cNvPr id="5" name="Text 2"/>
+          <p:cNvSpPr/>
+          <p:nvPr/>
+        </p:nvSpPr>
+        <p:spPr>
+          <a:xfrm>
+            <a:off x="5349240" y="1783080"/>
+            <a:ext cx="6522415" cy="4663440"/>
+          </a:xfrm>
+          <a:prstGeom prst="rect">
+            <a:avLst/>
+          </a:prstGeom>
+          <a:noFill/>
+          <a:ln/>
+        </p:spPr>
+        <p:txBody>
+          <a:bodyPr wrap="square" lIns="0" tIns="0" rIns="0" bIns="0" rtlCol="0" anchor="t"/>
+          <a:lstStyle/>
+          <a:p>
+            <a:pPr algn="l" indent="0" marL="0">
+              <a:spcAft>
+                <a:spcPts val="800"/>
+              </a:spcAft>
+              <a:buNone/>
+            </a:pPr>
+            <a:r>
+              <a:rPr lang="en-US" sz="4000" dirty="0">
+                <a:solidFill>
+                  <a:srgbClr val="111111"/>
+                </a:solidFill>
+                <a:latin typeface="Times New Roman" pitchFamily="34" charset="0"/>
+                <a:ea typeface="Times New Roman" pitchFamily="34" charset="-122"/>
+                <a:cs typeface="Times New Roman" pitchFamily="34" charset="-120"/>
+              </a:rPr>
+              <a:t>Why did the world population grow very slowly before 1750?</a:t>
+            </a:r>
+            <a:endParaRPr lang="en-US" sz="4000" dirty="0"/>
           </a:p>
         </p:txBody>
       </p:sp>
@@ -20535,7 +20195,7 @@
                 <a:ea typeface="Calibri" pitchFamily="34" charset="-122"/>
                 <a:cs typeface="Calibri" pitchFamily="34" charset="-120"/>
               </a:rPr>
-              <a:t>BOARD SUMMARY</a:t>
+              <a:t>FORMATIVE EVALUATION</a:t>
             </a:r>
             <a:endParaRPr lang="en-US" sz="1400" dirty="0"/>
           </a:p>
@@ -20558,7 +20218,7 @@
         <p:spPr>
           <a:xfrm>
             <a:off x="0" y="658368"/>
-            <a:ext cx="3840480" cy="5833872"/>
+            <a:ext cx="5120640" cy="5833872"/>
           </a:xfrm>
           <a:prstGeom prst="rect">
             <a:avLst/>
@@ -20573,8 +20233,8 @@
         </p:nvSpPr>
         <p:spPr>
           <a:xfrm>
-            <a:off x="4069080" y="1005840"/>
-            <a:ext cx="7802575" cy="731520"/>
+            <a:off x="5349240" y="1005840"/>
+            <a:ext cx="6522415" cy="731520"/>
           </a:xfrm>
           <a:prstGeom prst="rect">
             <a:avLst/>
@@ -20600,7 +20260,7 @@
                 <a:ea typeface="Times New Roman" pitchFamily="34" charset="-122"/>
                 <a:cs typeface="Times New Roman" pitchFamily="34" charset="-120"/>
               </a:rPr>
-              <a:t>3. Factors of Regional Differences</a:t>
+              <a:t>Expected Answer</a:t>
             </a:r>
             <a:endParaRPr lang="en-US" sz="3600" dirty="0"/>
           </a:p>
@@ -20614,8 +20274,8 @@
         </p:nvSpPr>
         <p:spPr>
           <a:xfrm>
-            <a:off x="4069080" y="1783080"/>
-            <a:ext cx="7802575" cy="4663440"/>
+            <a:off x="5349240" y="1783080"/>
+            <a:ext cx="6522415" cy="4663440"/>
           </a:xfrm>
           <a:prstGeom prst="rect">
             <a:avLst/>
@@ -20634,7 +20294,7 @@
               <a:buNone/>
             </a:pPr>
             <a:r>
-              <a:rPr lang="en-US" sz="4000" b="1" dirty="0">
+              <a:rPr lang="en-US" sz="4000" dirty="0">
                 <a:solidFill>
                   <a:srgbClr val="111111"/>
                 </a:solidFill>
@@ -20642,49 +20302,7 @@
                 <a:ea typeface="Times New Roman" pitchFamily="34" charset="-122"/>
                 <a:cs typeface="Times New Roman" pitchFamily="34" charset="-120"/>
               </a:rPr>
-              <a:t>Government policies:</a:t>
-            </a:r>
-            <a:endParaRPr lang="en-US" sz="4000" dirty="0"/>
-          </a:p>
-          <a:p>
-            <a:pPr algn="l" marL="342900" indent="-342900">
-              <a:spcAft>
-                <a:spcPts val="800"/>
-              </a:spcAft>
-              <a:buSzPct val="100000"/>
-              <a:buChar char="•"/>
-            </a:pPr>
-            <a:r>
-              <a:rPr lang="en-US" sz="4000" dirty="0">
-                <a:solidFill>
-                  <a:srgbClr val="111111"/>
-                </a:solidFill>
-                <a:latin typeface="Times New Roman" pitchFamily="34" charset="0"/>
-                <a:ea typeface="Times New Roman" pitchFamily="34" charset="-122"/>
-                <a:cs typeface="Times New Roman" pitchFamily="34" charset="-120"/>
-              </a:rPr>
-              <a:t>Pro-natalist policies encourage births, as in France and Russia.</a:t>
-            </a:r>
-            <a:endParaRPr lang="en-US" sz="4000" dirty="0"/>
-          </a:p>
-          <a:p>
-            <a:pPr algn="l" marL="342900" indent="-342900">
-              <a:spcAft>
-                <a:spcPts val="800"/>
-              </a:spcAft>
-              <a:buSzPct val="100000"/>
-              <a:buChar char="•"/>
-            </a:pPr>
-            <a:r>
-              <a:rPr lang="en-US" sz="4000" dirty="0">
-                <a:solidFill>
-                  <a:srgbClr val="111111"/>
-                </a:solidFill>
-                <a:latin typeface="Times New Roman" pitchFamily="34" charset="0"/>
-                <a:ea typeface="Times New Roman" pitchFamily="34" charset="-122"/>
-                <a:cs typeface="Times New Roman" pitchFamily="34" charset="-120"/>
-              </a:rPr>
-              <a:t>Anti-natalist policies limit births, as in China between about 1980 and 2015.</a:t>
+              <a:t>High birth rates were cancelled by high death rates from famine, war and disease.</a:t>
             </a:r>
             <a:endParaRPr lang="en-US" sz="4000" dirty="0"/>
           </a:p>
@@ -20861,7 +20479,7 @@
                 <a:ea typeface="Times New Roman" pitchFamily="34" charset="-122"/>
                 <a:cs typeface="Times New Roman" pitchFamily="34" charset="-120"/>
               </a:rPr>
-              <a:t>Evaluation 1</a:t>
+              <a:t>Evaluation 2</a:t>
             </a:r>
             <a:endParaRPr lang="en-US" sz="3600" dirty="0"/>
           </a:p>
@@ -20903,7 +20521,7 @@
                 <a:ea typeface="Times New Roman" pitchFamily="34" charset="-122"/>
                 <a:cs typeface="Times New Roman" pitchFamily="34" charset="-120"/>
               </a:rPr>
-              <a:t>Why did the world population grow very slowly before 1750?</a:t>
+              <a:t>Give two reasons why LEDCs grow faster than MEDCs.</a:t>
             </a:r>
             <a:endParaRPr lang="en-US" sz="4000" dirty="0"/>
           </a:p>
@@ -21122,7 +20740,7 @@
                 <a:ea typeface="Times New Roman" pitchFamily="34" charset="-122"/>
                 <a:cs typeface="Times New Roman" pitchFamily="34" charset="-120"/>
               </a:rPr>
-              <a:t>High birth rates were cancelled by high death rates from famine, war and disease.</a:t>
+              <a:t>Large families are valued, death rates have fallen, few women are educated and family planning is limited (any two).</a:t>
             </a:r>
             <a:endParaRPr lang="en-US" sz="4000" dirty="0"/>
           </a:p>
@@ -21234,7 +20852,7 @@
                 <a:ea typeface="Calibri" pitchFamily="34" charset="-122"/>
                 <a:cs typeface="Calibri" pitchFamily="34" charset="-120"/>
               </a:rPr>
-              <a:t>FORMATIVE EVALUATION</a:t>
+              <a:t>REMEDIATION</a:t>
             </a:r>
             <a:endParaRPr lang="en-US" sz="1400" dirty="0"/>
           </a:p>
@@ -21257,7 +20875,7 @@
         <p:spPr>
           <a:xfrm>
             <a:off x="0" y="658368"/>
-            <a:ext cx="5120640" cy="5833872"/>
+            <a:ext cx="2468880" cy="5833872"/>
           </a:xfrm>
           <a:prstGeom prst="rect">
             <a:avLst/>
@@ -21272,8 +20890,8 @@
         </p:nvSpPr>
         <p:spPr>
           <a:xfrm>
-            <a:off x="5349240" y="1005840"/>
-            <a:ext cx="6522415" cy="731520"/>
+            <a:off x="2697480" y="1005840"/>
+            <a:ext cx="9174175" cy="731520"/>
           </a:xfrm>
           <a:prstGeom prst="rect">
             <a:avLst/>
@@ -21299,7 +20917,7 @@
                 <a:ea typeface="Times New Roman" pitchFamily="34" charset="-122"/>
                 <a:cs typeface="Times New Roman" pitchFamily="34" charset="-120"/>
               </a:rPr>
-              <a:t>Evaluation 2</a:t>
+              <a:t>Remediation</a:t>
             </a:r>
             <a:endParaRPr lang="en-US" sz="3600" dirty="0"/>
           </a:p>
@@ -21313,8 +20931,8 @@
         </p:nvSpPr>
         <p:spPr>
           <a:xfrm>
-            <a:off x="5349240" y="1783080"/>
-            <a:ext cx="6522415" cy="4663440"/>
+            <a:off x="2697480" y="1783080"/>
+            <a:ext cx="9174175" cy="4663440"/>
           </a:xfrm>
           <a:prstGeom prst="rect">
             <a:avLst/>
@@ -21333,7 +20951,7 @@
               <a:buNone/>
             </a:pPr>
             <a:r>
-              <a:rPr lang="en-US" sz="4000" dirty="0">
+              <a:rPr lang="en-US" sz="4000" b="1" dirty="0">
                 <a:solidFill>
                   <a:srgbClr val="111111"/>
                 </a:solidFill>
@@ -21341,7 +20959,73 @@
                 <a:ea typeface="Times New Roman" pitchFamily="34" charset="-122"/>
                 <a:cs typeface="Times New Roman" pitchFamily="34" charset="-120"/>
               </a:rPr>
-              <a:t>Give two reasons why LEDCs grow faster than MEDCs.</a:t>
+              <a:t>Fill in the blanks:</a:t>
+            </a:r>
+            <a:endParaRPr lang="en-US" sz="4000" dirty="0"/>
+          </a:p>
+          <a:p>
+            <a:pPr algn="l" marL="342900" indent="-342900">
+              <a:spcAft>
+                <a:spcPts val="800"/>
+              </a:spcAft>
+              <a:buSzPct val="100000"/>
+              <a:buFont typeface="+mj-lt"/>
+              <a:buAutoNum type="arabicPeriod" startAt="1"/>
+            </a:pPr>
+            <a:r>
+              <a:rPr lang="en-US" sz="4000" dirty="0">
+                <a:solidFill>
+                  <a:srgbClr val="111111"/>
+                </a:solidFill>
+                <a:latin typeface="Times New Roman" pitchFamily="34" charset="0"/>
+                <a:ea typeface="Times New Roman" pitchFamily="34" charset="-122"/>
+                <a:cs typeface="Times New Roman" pitchFamily="34" charset="-120"/>
+              </a:rPr>
+              <a:t>The graph of world population has the shape of a ______.</a:t>
+            </a:r>
+            <a:endParaRPr lang="en-US" sz="4000" dirty="0"/>
+          </a:p>
+          <a:p>
+            <a:pPr algn="l" marL="342900" indent="-342900">
+              <a:spcAft>
+                <a:spcPts val="800"/>
+              </a:spcAft>
+              <a:buSzPct val="100000"/>
+              <a:buFont typeface="+mj-lt"/>
+              <a:buAutoNum type="arabicPeriod" startAt="1"/>
+            </a:pPr>
+            <a:r>
+              <a:rPr lang="en-US" sz="4000" dirty="0">
+                <a:solidFill>
+                  <a:srgbClr val="111111"/>
+                </a:solidFill>
+                <a:latin typeface="Times New Roman" pitchFamily="34" charset="0"/>
+                <a:ea typeface="Times New Roman" pitchFamily="34" charset="-122"/>
+                <a:cs typeface="Times New Roman" pitchFamily="34" charset="-120"/>
+              </a:rPr>
+              <a:t>The world reached 8 billion in ______.</a:t>
+            </a:r>
+            <a:endParaRPr lang="en-US" sz="4000" dirty="0"/>
+          </a:p>
+          <a:p>
+            <a:pPr algn="l" marL="342900" indent="-342900">
+              <a:spcAft>
+                <a:spcPts val="800"/>
+              </a:spcAft>
+              <a:buSzPct val="100000"/>
+              <a:buFont typeface="+mj-lt"/>
+              <a:buAutoNum type="arabicPeriod" startAt="1"/>
+            </a:pPr>
+            <a:r>
+              <a:rPr lang="en-US" sz="4000" dirty="0">
+                <a:solidFill>
+                  <a:srgbClr val="111111"/>
+                </a:solidFill>
+                <a:latin typeface="Times New Roman" pitchFamily="34" charset="0"/>
+                <a:ea typeface="Times New Roman" pitchFamily="34" charset="-122"/>
+                <a:cs typeface="Times New Roman" pitchFamily="34" charset="-120"/>
+              </a:rPr>
+              <a:t>The most important factor of falling births is the education of ______.</a:t>
             </a:r>
             <a:endParaRPr lang="en-US" sz="4000" dirty="0"/>
           </a:p>
@@ -21453,7 +21137,7 @@
                 <a:ea typeface="Calibri" pitchFamily="34" charset="-122"/>
                 <a:cs typeface="Calibri" pitchFamily="34" charset="-120"/>
               </a:rPr>
-              <a:t>FORMATIVE EVALUATION</a:t>
+              <a:t>HOMEWORK</a:t>
             </a:r>
             <a:endParaRPr lang="en-US" sz="1400" dirty="0"/>
           </a:p>
@@ -21518,7 +21202,7 @@
                 <a:ea typeface="Times New Roman" pitchFamily="34" charset="-122"/>
                 <a:cs typeface="Times New Roman" pitchFamily="34" charset="-120"/>
               </a:rPr>
-              <a:t>Expected Answer</a:t>
+              <a:t>Homework</a:t>
             </a:r>
             <a:endParaRPr lang="en-US" sz="3600" dirty="0"/>
           </a:p>
@@ -21560,7 +21244,7 @@
                 <a:ea typeface="Times New Roman" pitchFamily="34" charset="-122"/>
                 <a:cs typeface="Times New Roman" pitchFamily="34" charset="-120"/>
               </a:rPr>
-              <a:t>Large families are valued, death rates have fallen, few women are educated and family planning is limited (any two).</a:t>
+              <a:t>Write the formula of population change.</a:t>
             </a:r>
             <a:endParaRPr lang="en-US" sz="4000" dirty="0"/>
           </a:p>
@@ -21672,7 +21356,7 @@
                 <a:ea typeface="Calibri" pitchFamily="34" charset="-122"/>
                 <a:cs typeface="Calibri" pitchFamily="34" charset="-120"/>
               </a:rPr>
-              <a:t>REMEDIATION</a:t>
+              <a:t>NEXT LESSON</a:t>
             </a:r>
             <a:endParaRPr lang="en-US" sz="1400" dirty="0"/>
           </a:p>
@@ -21695,7 +21379,7 @@
         <p:spPr>
           <a:xfrm>
             <a:off x="0" y="658368"/>
-            <a:ext cx="2468880" cy="5833872"/>
+            <a:ext cx="5120640" cy="5833872"/>
           </a:xfrm>
           <a:prstGeom prst="rect">
             <a:avLst/>
@@ -21710,8 +21394,8 @@
         </p:nvSpPr>
         <p:spPr>
           <a:xfrm>
-            <a:off x="2697480" y="1005840"/>
-            <a:ext cx="9174175" cy="731520"/>
+            <a:off x="5349240" y="1005840"/>
+            <a:ext cx="6522415" cy="731520"/>
           </a:xfrm>
           <a:prstGeom prst="rect">
             <a:avLst/>
@@ -21737,7 +21421,7 @@
                 <a:ea typeface="Times New Roman" pitchFamily="34" charset="-122"/>
                 <a:cs typeface="Times New Roman" pitchFamily="34" charset="-120"/>
               </a:rPr>
-              <a:t>Remediation</a:t>
+              <a:t>Next Lesson</a:t>
             </a:r>
             <a:endParaRPr lang="en-US" sz="3600" dirty="0"/>
           </a:p>
@@ -21751,8 +21435,8 @@
         </p:nvSpPr>
         <p:spPr>
           <a:xfrm>
-            <a:off x="2697480" y="1783080"/>
-            <a:ext cx="9174175" cy="4663440"/>
+            <a:off x="5349240" y="1783080"/>
+            <a:ext cx="6522415" cy="4663440"/>
           </a:xfrm>
           <a:prstGeom prst="rect">
             <a:avLst/>
@@ -21761,10 +21445,10 @@
           <a:ln/>
         </p:spPr>
         <p:txBody>
-          <a:bodyPr wrap="square" lIns="0" tIns="0" rIns="0" bIns="0" rtlCol="0" anchor="t"/>
-          <a:lstStyle/>
-          <a:p>
-            <a:pPr algn="l" indent="0" marL="0">
+          <a:bodyPr wrap="square" lIns="0" tIns="0" rIns="0" bIns="0" rtlCol="0" anchor="ctr"/>
+          <a:lstStyle/>
+          <a:p>
+            <a:pPr algn="ctr" indent="0" marL="0">
               <a:spcAft>
                 <a:spcPts val="800"/>
               </a:spcAft>
@@ -21779,73 +21463,27 @@
                 <a:ea typeface="Times New Roman" pitchFamily="34" charset="-122"/>
                 <a:cs typeface="Times New Roman" pitchFamily="34" charset="-120"/>
               </a:rPr>
-              <a:t>Fill in the blanks:</a:t>
+              <a:t>Our next lesson will be on:</a:t>
             </a:r>
             <a:endParaRPr lang="en-US" sz="4000" dirty="0"/>
           </a:p>
           <a:p>
-            <a:pPr algn="l" marL="342900" indent="-342900">
+            <a:pPr algn="ctr" indent="0" marL="0">
               <a:spcAft>
                 <a:spcPts val="800"/>
               </a:spcAft>
-              <a:buSzPct val="100000"/>
-              <a:buFont typeface="+mj-lt"/>
-              <a:buAutoNum type="arabicPeriod" startAt="1"/>
-            </a:pPr>
-            <a:r>
-              <a:rPr lang="en-US" sz="4000" dirty="0">
-                <a:solidFill>
-                  <a:srgbClr val="111111"/>
+              <a:buNone/>
+            </a:pPr>
+            <a:r>
+              <a:rPr lang="en-US" sz="4000" b="1" dirty="0">
+                <a:solidFill>
+                  <a:srgbClr val="990011"/>
                 </a:solidFill>
                 <a:latin typeface="Times New Roman" pitchFamily="34" charset="0"/>
                 <a:ea typeface="Times New Roman" pitchFamily="34" charset="-122"/>
                 <a:cs typeface="Times New Roman" pitchFamily="34" charset="-120"/>
               </a:rPr>
-              <a:t>The graph of world population has the shape of a ______.</a:t>
-            </a:r>
-            <a:endParaRPr lang="en-US" sz="4000" dirty="0"/>
-          </a:p>
-          <a:p>
-            <a:pPr algn="l" marL="342900" indent="-342900">
-              <a:spcAft>
-                <a:spcPts val="800"/>
-              </a:spcAft>
-              <a:buSzPct val="100000"/>
-              <a:buFont typeface="+mj-lt"/>
-              <a:buAutoNum type="arabicPeriod" startAt="1"/>
-            </a:pPr>
-            <a:r>
-              <a:rPr lang="en-US" sz="4000" dirty="0">
-                <a:solidFill>
-                  <a:srgbClr val="111111"/>
-                </a:solidFill>
-                <a:latin typeface="Times New Roman" pitchFamily="34" charset="0"/>
-                <a:ea typeface="Times New Roman" pitchFamily="34" charset="-122"/>
-                <a:cs typeface="Times New Roman" pitchFamily="34" charset="-120"/>
-              </a:rPr>
-              <a:t>The world reached 8 billion in ______.</a:t>
-            </a:r>
-            <a:endParaRPr lang="en-US" sz="4000" dirty="0"/>
-          </a:p>
-          <a:p>
-            <a:pPr algn="l" marL="342900" indent="-342900">
-              <a:spcAft>
-                <a:spcPts val="800"/>
-              </a:spcAft>
-              <a:buSzPct val="100000"/>
-              <a:buFont typeface="+mj-lt"/>
-              <a:buAutoNum type="arabicPeriod" startAt="1"/>
-            </a:pPr>
-            <a:r>
-              <a:rPr lang="en-US" sz="4000" dirty="0">
-                <a:solidFill>
-                  <a:srgbClr val="111111"/>
-                </a:solidFill>
-                <a:latin typeface="Times New Roman" pitchFamily="34" charset="0"/>
-                <a:ea typeface="Times New Roman" pitchFamily="34" charset="-122"/>
-                <a:cs typeface="Times New Roman" pitchFamily="34" charset="-120"/>
-              </a:rPr>
-              <a:t>The most important factor of falling births is the education of ______.</a:t>
+              <a:t>Lesson 9: Population Growth and its Determinants</a:t>
             </a:r>
             <a:endParaRPr lang="en-US" sz="4000" dirty="0"/>
           </a:p>
@@ -22288,46 +21926,22 @@
                 <a:ea typeface="Calibri" pitchFamily="34" charset="-122"/>
                 <a:cs typeface="Calibri" pitchFamily="34" charset="-120"/>
               </a:rPr>
-              <a:t>HOMEWORK</a:t>
+              <a:t>BILINGUAL GAME</a:t>
             </a:r>
             <a:endParaRPr lang="en-US" sz="1400" dirty="0"/>
           </a:p>
         </p:txBody>
       </p:sp>
-      <p:pic>
-        <p:nvPicPr>
-          <p:cNvPr id="3" name="Image 0" descr="/home/claude/f4/img/minesec_sheet.png">    </p:cNvPr>
-          <p:cNvPicPr>
-            <a:picLocks noChangeAspect="1"/>
-          </p:cNvPicPr>
-          <p:nvPr/>
-        </p:nvPicPr>
-        <p:blipFill>
-          <a:blip r:embed="rId1"/>
-          <a:stretch>
-            <a:fillRect/>
-          </a:stretch>
-        </p:blipFill>
-        <p:spPr>
-          <a:xfrm>
-            <a:off x="0" y="658368"/>
-            <a:ext cx="5120640" cy="5833872"/>
-          </a:xfrm>
-          <a:prstGeom prst="rect">
-            <a:avLst/>
-          </a:prstGeom>
-        </p:spPr>
-      </p:pic>
-      <p:sp>
-        <p:nvSpPr>
-          <p:cNvPr id="4" name="Text 1"/>
+      <p:sp>
+        <p:nvSpPr>
+          <p:cNvPr id="3" name="Text 1"/>
           <p:cNvSpPr/>
           <p:nvPr/>
         </p:nvSpPr>
         <p:spPr>
           <a:xfrm>
-            <a:off x="5349240" y="1005840"/>
-            <a:ext cx="6522415" cy="731520"/>
+            <a:off x="457200" y="1005840"/>
+            <a:ext cx="11277295" cy="731520"/>
           </a:xfrm>
           <a:prstGeom prst="rect">
             <a:avLst/>
@@ -22336,9 +21950,7 @@
           <a:ln/>
         </p:spPr>
         <p:txBody>
-          <a:bodyPr wrap="square" lIns="0" tIns="0" rIns="0" bIns="0" rtlCol="0" anchor="ctr">
-            <a:normAutofit/>
-          </a:bodyPr>
+          <a:bodyPr wrap="square" lIns="0" tIns="0" rIns="0" bIns="0" rtlCol="0" anchor="ctr"/>
           <a:lstStyle/>
           <a:p>
             <a:pPr algn="ctr" indent="0" marL="0">
@@ -22353,438 +21965,6 @@
                 <a:ea typeface="Times New Roman" pitchFamily="34" charset="-122"/>
                 <a:cs typeface="Times New Roman" pitchFamily="34" charset="-120"/>
               </a:rPr>
-              <a:t>Homework</a:t>
-            </a:r>
-            <a:endParaRPr lang="en-US" sz="3600" dirty="0"/>
-          </a:p>
-        </p:txBody>
-      </p:sp>
-      <p:sp>
-        <p:nvSpPr>
-          <p:cNvPr id="5" name="Text 2"/>
-          <p:cNvSpPr/>
-          <p:nvPr/>
-        </p:nvSpPr>
-        <p:spPr>
-          <a:xfrm>
-            <a:off x="5349240" y="1783080"/>
-            <a:ext cx="6522415" cy="4663440"/>
-          </a:xfrm>
-          <a:prstGeom prst="rect">
-            <a:avLst/>
-          </a:prstGeom>
-          <a:noFill/>
-          <a:ln/>
-        </p:spPr>
-        <p:txBody>
-          <a:bodyPr wrap="square" lIns="0" tIns="0" rIns="0" bIns="0" rtlCol="0" anchor="t"/>
-          <a:lstStyle/>
-          <a:p>
-            <a:pPr algn="l" indent="0" marL="0">
-              <a:spcAft>
-                <a:spcPts val="800"/>
-              </a:spcAft>
-              <a:buNone/>
-            </a:pPr>
-            <a:r>
-              <a:rPr lang="en-US" sz="4000" dirty="0">
-                <a:solidFill>
-                  <a:srgbClr val="111111"/>
-                </a:solidFill>
-                <a:latin typeface="Times New Roman" pitchFamily="34" charset="0"/>
-                <a:ea typeface="Times New Roman" pitchFamily="34" charset="-122"/>
-                <a:cs typeface="Times New Roman" pitchFamily="34" charset="-120"/>
-              </a:rPr>
-              <a:t>Write the formula of population change.</a:t>
-            </a:r>
-            <a:endParaRPr lang="en-US" sz="4000" dirty="0"/>
-          </a:p>
-        </p:txBody>
-      </p:sp>
-      <p:sp>
-        <p:nvSpPr>
-          <p:cNvPr id="25" name="Slide Number Placeholder 0"/>
-          <p:cNvSpPr>
-            <a:spLocks noGrp="1"/>
-          </p:cNvSpPr>
-          <p:nvPr>
-            <p:ph type="sldNum" sz="quarter" idx="4294967295"/>
-          </p:nvPr>
-        </p:nvSpPr>
-        <p:spPr>
-          <a:xfrm>
-            <a:off x="27432" y="91440"/>
-            <a:ext cx="585216" cy="475488"/>
-          </a:xfrm>
-          <a:prstGeom prst="rect">
-            <a:avLst/>
-          </a:prstGeom>
-          <a:extLst>
-            <a:ext uri="{C572A759-6A51-4108-AA02-DFA0A04FC94B}">
-              <ma14:wrappingTextBoxFlag xmlns:ma14="http://schemas.microsoft.com/office/mac/drawingml/2011/main" val="0"/>
-            </a:ext>
-          </a:extLst>
-        </p:spPr>
-        <p:txBody>
-          <a:bodyPr/>
-          <a:lstStyle>
-            <a:lvl1pPr>
-              <a:defRPr sz="2000">
-                <a:solidFill>
-                  <a:srgbClr val="FFFFFF"/>
-                </a:solidFill>
-                <a:latin typeface="Calibri"/>
-                <a:ea typeface="Calibri"/>
-                <a:cs typeface="Calibri"/>
-              </a:defRPr>
-            </a:lvl1pPr>
-          </a:lstStyle>
-          <a:p>
-            <a:pPr algn="ctr"/>
-            <a:fld id="{F7021451-1387-4CA6-816F-3879F97B5CBC}" type="slidenum">
-              <a:rPr b="1" lang="en-US"/>
-              <a:t>60</a:t>
-            </a:fld>
-            <a:endParaRPr lang="en-US"/>
-          </a:p>
-        </p:txBody>
-      </p:sp>
-    </p:spTree>
-  </p:cSld>
-  <p:clrMapOvr>
-    <a:masterClrMapping/>
-  </p:clrMapOvr>
-</p:sld>
-</file>
-
-<file path=ppt/slides/slide61.xml><?xml version="1.0" encoding="utf-8"?>
-<p:sld xmlns:a="http://schemas.openxmlformats.org/drawingml/2006/main" xmlns:r="http://schemas.openxmlformats.org/officeDocument/2006/relationships" xmlns:p="http://schemas.openxmlformats.org/presentationml/2006/main">
-  <p:cSld name="Slide 61">
-    <p:spTree>
-      <p:nvGrpSpPr>
-        <p:cNvPr id="1" name=""/>
-        <p:cNvGrpSpPr/>
-        <p:nvPr/>
-      </p:nvGrpSpPr>
-      <p:grpSpPr>
-        <a:xfrm>
-          <a:off x="0" y="0"/>
-          <a:ext cx="0" cy="0"/>
-          <a:chOff x="0" y="0"/>
-          <a:chExt cx="0" cy="0"/>
-        </a:xfrm>
-      </p:grpSpPr>
-      <p:sp>
-        <p:nvSpPr>
-          <p:cNvPr id="2" name="Text 0"/>
-          <p:cNvSpPr/>
-          <p:nvPr/>
-        </p:nvSpPr>
-        <p:spPr>
-          <a:xfrm>
-            <a:off x="457200" y="713232"/>
-            <a:ext cx="11368735" cy="274320"/>
-          </a:xfrm>
-          <a:prstGeom prst="rect">
-            <a:avLst/>
-          </a:prstGeom>
-          <a:noFill/>
-          <a:ln/>
-        </p:spPr>
-        <p:txBody>
-          <a:bodyPr wrap="square" lIns="0" tIns="0" rIns="0" bIns="0" rtlCol="0" anchor="ctr"/>
-          <a:lstStyle/>
-          <a:p>
-            <a:pPr algn="r" indent="0" marL="0">
-              <a:buNone/>
-            </a:pPr>
-            <a:r>
-              <a:rPr lang="en-US" sz="1400" b="1" dirty="0">
-                <a:solidFill>
-                  <a:srgbClr val="1C3F6E"/>
-                </a:solidFill>
-                <a:latin typeface="Calibri" pitchFamily="34" charset="0"/>
-                <a:ea typeface="Calibri" pitchFamily="34" charset="-122"/>
-                <a:cs typeface="Calibri" pitchFamily="34" charset="-120"/>
-              </a:rPr>
-              <a:t>NEXT LESSON</a:t>
-            </a:r>
-            <a:endParaRPr lang="en-US" sz="1400" dirty="0"/>
-          </a:p>
-        </p:txBody>
-      </p:sp>
-      <p:pic>
-        <p:nvPicPr>
-          <p:cNvPr id="3" name="Image 0" descr="/home/claude/f4/img/minesec_sheet.png">    </p:cNvPr>
-          <p:cNvPicPr>
-            <a:picLocks noChangeAspect="1"/>
-          </p:cNvPicPr>
-          <p:nvPr/>
-        </p:nvPicPr>
-        <p:blipFill>
-          <a:blip r:embed="rId1"/>
-          <a:stretch>
-            <a:fillRect/>
-          </a:stretch>
-        </p:blipFill>
-        <p:spPr>
-          <a:xfrm>
-            <a:off x="0" y="658368"/>
-            <a:ext cx="5120640" cy="5833872"/>
-          </a:xfrm>
-          <a:prstGeom prst="rect">
-            <a:avLst/>
-          </a:prstGeom>
-        </p:spPr>
-      </p:pic>
-      <p:sp>
-        <p:nvSpPr>
-          <p:cNvPr id="4" name="Text 1"/>
-          <p:cNvSpPr/>
-          <p:nvPr/>
-        </p:nvSpPr>
-        <p:spPr>
-          <a:xfrm>
-            <a:off x="5349240" y="1005840"/>
-            <a:ext cx="6522415" cy="731520"/>
-          </a:xfrm>
-          <a:prstGeom prst="rect">
-            <a:avLst/>
-          </a:prstGeom>
-          <a:noFill/>
-          <a:ln/>
-        </p:spPr>
-        <p:txBody>
-          <a:bodyPr wrap="square" lIns="0" tIns="0" rIns="0" bIns="0" rtlCol="0" anchor="ctr">
-            <a:normAutofit/>
-          </a:bodyPr>
-          <a:lstStyle/>
-          <a:p>
-            <a:pPr algn="ctr" indent="0" marL="0">
-              <a:buNone/>
-            </a:pPr>
-            <a:r>
-              <a:rPr lang="en-US" sz="3600" b="1" dirty="0">
-                <a:solidFill>
-                  <a:srgbClr val="990011"/>
-                </a:solidFill>
-                <a:latin typeface="Times New Roman" pitchFamily="34" charset="0"/>
-                <a:ea typeface="Times New Roman" pitchFamily="34" charset="-122"/>
-                <a:cs typeface="Times New Roman" pitchFamily="34" charset="-120"/>
-              </a:rPr>
-              <a:t>Next Lesson</a:t>
-            </a:r>
-            <a:endParaRPr lang="en-US" sz="3600" dirty="0"/>
-          </a:p>
-        </p:txBody>
-      </p:sp>
-      <p:sp>
-        <p:nvSpPr>
-          <p:cNvPr id="5" name="Text 2"/>
-          <p:cNvSpPr/>
-          <p:nvPr/>
-        </p:nvSpPr>
-        <p:spPr>
-          <a:xfrm>
-            <a:off x="5349240" y="1783080"/>
-            <a:ext cx="6522415" cy="4663440"/>
-          </a:xfrm>
-          <a:prstGeom prst="rect">
-            <a:avLst/>
-          </a:prstGeom>
-          <a:noFill/>
-          <a:ln/>
-        </p:spPr>
-        <p:txBody>
-          <a:bodyPr wrap="square" lIns="0" tIns="0" rIns="0" bIns="0" rtlCol="0" anchor="ctr"/>
-          <a:lstStyle/>
-          <a:p>
-            <a:pPr algn="ctr" indent="0" marL="0">
-              <a:spcAft>
-                <a:spcPts val="800"/>
-              </a:spcAft>
-              <a:buNone/>
-            </a:pPr>
-            <a:r>
-              <a:rPr lang="en-US" sz="4000" b="1" dirty="0">
-                <a:solidFill>
-                  <a:srgbClr val="111111"/>
-                </a:solidFill>
-                <a:latin typeface="Times New Roman" pitchFamily="34" charset="0"/>
-                <a:ea typeface="Times New Roman" pitchFamily="34" charset="-122"/>
-                <a:cs typeface="Times New Roman" pitchFamily="34" charset="-120"/>
-              </a:rPr>
-              <a:t>Our next lesson will be on:</a:t>
-            </a:r>
-            <a:endParaRPr lang="en-US" sz="4000" dirty="0"/>
-          </a:p>
-          <a:p>
-            <a:pPr algn="ctr" indent="0" marL="0">
-              <a:spcAft>
-                <a:spcPts val="800"/>
-              </a:spcAft>
-              <a:buNone/>
-            </a:pPr>
-            <a:r>
-              <a:rPr lang="en-US" sz="4000" b="1" dirty="0">
-                <a:solidFill>
-                  <a:srgbClr val="990011"/>
-                </a:solidFill>
-                <a:latin typeface="Times New Roman" pitchFamily="34" charset="0"/>
-                <a:ea typeface="Times New Roman" pitchFamily="34" charset="-122"/>
-                <a:cs typeface="Times New Roman" pitchFamily="34" charset="-120"/>
-              </a:rPr>
-              <a:t>Lesson 9: Population Growth and its Determinants</a:t>
-            </a:r>
-            <a:endParaRPr lang="en-US" sz="4000" dirty="0"/>
-          </a:p>
-        </p:txBody>
-      </p:sp>
-      <p:sp>
-        <p:nvSpPr>
-          <p:cNvPr id="25" name="Slide Number Placeholder 0"/>
-          <p:cNvSpPr>
-            <a:spLocks noGrp="1"/>
-          </p:cNvSpPr>
-          <p:nvPr>
-            <p:ph type="sldNum" sz="quarter" idx="4294967295"/>
-          </p:nvPr>
-        </p:nvSpPr>
-        <p:spPr>
-          <a:xfrm>
-            <a:off x="27432" y="91440"/>
-            <a:ext cx="585216" cy="475488"/>
-          </a:xfrm>
-          <a:prstGeom prst="rect">
-            <a:avLst/>
-          </a:prstGeom>
-          <a:extLst>
-            <a:ext uri="{C572A759-6A51-4108-AA02-DFA0A04FC94B}">
-              <ma14:wrappingTextBoxFlag xmlns:ma14="http://schemas.microsoft.com/office/mac/drawingml/2011/main" val="0"/>
-            </a:ext>
-          </a:extLst>
-        </p:spPr>
-        <p:txBody>
-          <a:bodyPr/>
-          <a:lstStyle>
-            <a:lvl1pPr>
-              <a:defRPr sz="2000">
-                <a:solidFill>
-                  <a:srgbClr val="FFFFFF"/>
-                </a:solidFill>
-                <a:latin typeface="Calibri"/>
-                <a:ea typeface="Calibri"/>
-                <a:cs typeface="Calibri"/>
-              </a:defRPr>
-            </a:lvl1pPr>
-          </a:lstStyle>
-          <a:p>
-            <a:pPr algn="ctr"/>
-            <a:fld id="{F7021451-1387-4CA6-816F-3879F97B5CBC}" type="slidenum">
-              <a:rPr b="1" lang="en-US"/>
-              <a:t>61</a:t>
-            </a:fld>
-            <a:endParaRPr lang="en-US"/>
-          </a:p>
-        </p:txBody>
-      </p:sp>
-    </p:spTree>
-  </p:cSld>
-  <p:clrMapOvr>
-    <a:masterClrMapping/>
-  </p:clrMapOvr>
-</p:sld>
-</file>
-
-<file path=ppt/slides/slide62.xml><?xml version="1.0" encoding="utf-8"?>
-<p:sld xmlns:a="http://schemas.openxmlformats.org/drawingml/2006/main" xmlns:r="http://schemas.openxmlformats.org/officeDocument/2006/relationships" xmlns:p="http://schemas.openxmlformats.org/presentationml/2006/main">
-  <p:cSld name="Slide 62">
-    <p:spTree>
-      <p:nvGrpSpPr>
-        <p:cNvPr id="1" name=""/>
-        <p:cNvGrpSpPr/>
-        <p:nvPr/>
-      </p:nvGrpSpPr>
-      <p:grpSpPr>
-        <a:xfrm>
-          <a:off x="0" y="0"/>
-          <a:ext cx="0" cy="0"/>
-          <a:chOff x="0" y="0"/>
-          <a:chExt cx="0" cy="0"/>
-        </a:xfrm>
-      </p:grpSpPr>
-      <p:sp>
-        <p:nvSpPr>
-          <p:cNvPr id="2" name="Text 0"/>
-          <p:cNvSpPr/>
-          <p:nvPr/>
-        </p:nvSpPr>
-        <p:spPr>
-          <a:xfrm>
-            <a:off x="457200" y="713232"/>
-            <a:ext cx="11368735" cy="274320"/>
-          </a:xfrm>
-          <a:prstGeom prst="rect">
-            <a:avLst/>
-          </a:prstGeom>
-          <a:noFill/>
-          <a:ln/>
-        </p:spPr>
-        <p:txBody>
-          <a:bodyPr wrap="square" lIns="0" tIns="0" rIns="0" bIns="0" rtlCol="0" anchor="ctr"/>
-          <a:lstStyle/>
-          <a:p>
-            <a:pPr algn="r" indent="0" marL="0">
-              <a:buNone/>
-            </a:pPr>
-            <a:r>
-              <a:rPr lang="en-US" sz="1400" b="1" dirty="0">
-                <a:solidFill>
-                  <a:srgbClr val="1C3F6E"/>
-                </a:solidFill>
-                <a:latin typeface="Calibri" pitchFamily="34" charset="0"/>
-                <a:ea typeface="Calibri" pitchFamily="34" charset="-122"/>
-                <a:cs typeface="Calibri" pitchFamily="34" charset="-120"/>
-              </a:rPr>
-              <a:t>BILINGUAL GAME</a:t>
-            </a:r>
-            <a:endParaRPr lang="en-US" sz="1400" dirty="0"/>
-          </a:p>
-        </p:txBody>
-      </p:sp>
-      <p:sp>
-        <p:nvSpPr>
-          <p:cNvPr id="3" name="Text 1"/>
-          <p:cNvSpPr/>
-          <p:nvPr/>
-        </p:nvSpPr>
-        <p:spPr>
-          <a:xfrm>
-            <a:off x="457200" y="1005840"/>
-            <a:ext cx="11277295" cy="731520"/>
-          </a:xfrm>
-          <a:prstGeom prst="rect">
-            <a:avLst/>
-          </a:prstGeom>
-          <a:noFill/>
-          <a:ln/>
-        </p:spPr>
-        <p:txBody>
-          <a:bodyPr wrap="square" lIns="0" tIns="0" rIns="0" bIns="0" rtlCol="0" anchor="ctr"/>
-          <a:lstStyle/>
-          <a:p>
-            <a:pPr algn="ctr" indent="0" marL="0">
-              <a:buNone/>
-            </a:pPr>
-            <a:r>
-              <a:rPr lang="en-US" sz="3600" b="1" dirty="0">
-                <a:solidFill>
-                  <a:srgbClr val="990011"/>
-                </a:solidFill>
-                <a:latin typeface="Times New Roman" pitchFamily="34" charset="0"/>
-                <a:ea typeface="Times New Roman" pitchFamily="34" charset="-122"/>
-                <a:cs typeface="Times New Roman" pitchFamily="34" charset="-120"/>
-              </a:rPr>
               <a:t>Bilingual Game (Jeu Bilingue)</a:t>
             </a:r>
             <a:endParaRPr lang="en-US" sz="3600" dirty="0"/>
@@ -22793,7 +21973,7 @@
       </p:sp>
       <p:graphicFrame>
         <p:nvGraphicFramePr>
-          <p:cNvPr id="63" name="Table 0"/>
+          <p:cNvPr id="61" name="Table 0"/>
           <p:cNvGraphicFramePr>
             <a:graphicFrameLocks noGrp="1"/>
           </p:cNvGraphicFramePr>
@@ -23829,7 +23009,7 @@
             <a:pPr algn="ctr"/>
             <a:fld id="{F7021451-1387-4CA6-816F-3879F97B5CBC}" type="slidenum">
               <a:rPr b="1" lang="en-US"/>
-              <a:t>62</a:t>
+              <a:t>60</a:t>
             </a:fld>
             <a:endParaRPr lang="en-US"/>
           </a:p>
@@ -23843,9 +23023,9 @@
 </p:sld>
 </file>
 
-<file path=ppt/slides/slide63.xml><?xml version="1.0" encoding="utf-8"?>
+<file path=ppt/slides/slide61.xml><?xml version="1.0" encoding="utf-8"?>
 <p:sld xmlns:a="http://schemas.openxmlformats.org/drawingml/2006/main" xmlns:r="http://schemas.openxmlformats.org/officeDocument/2006/relationships" xmlns:p="http://schemas.openxmlformats.org/presentationml/2006/main">
-  <p:cSld name="Slide 63">
+  <p:cSld name="Slide 61">
     <p:spTree>
       <p:nvGrpSpPr>
         <p:cNvPr id="1" name=""/>
@@ -23940,7 +23120,7 @@
       </p:sp>
       <p:graphicFrame>
         <p:nvGraphicFramePr>
-          <p:cNvPr id="64" name="Table 0"/>
+          <p:cNvPr id="62" name="Table 0"/>
           <p:cNvGraphicFramePr>
             <a:graphicFrameLocks noGrp="1"/>
           </p:cNvGraphicFramePr>
@@ -24562,7 +23742,7 @@
             <a:pPr algn="ctr"/>
             <a:fld id="{F7021451-1387-4CA6-816F-3879F97B5CBC}" type="slidenum">
               <a:rPr b="1" lang="en-US"/>
-              <a:t>63</a:t>
+              <a:t>61</a:t>
             </a:fld>
             <a:endParaRPr lang="en-US"/>
           </a:p>
@@ -24576,9 +23756,9 @@
 </p:sld>
 </file>
 
-<file path=ppt/slides/slide64.xml><?xml version="1.0" encoding="utf-8"?>
+<file path=ppt/slides/slide62.xml><?xml version="1.0" encoding="utf-8"?>
 <p:sld xmlns:a="http://schemas.openxmlformats.org/drawingml/2006/main" xmlns:r="http://schemas.openxmlformats.org/officeDocument/2006/relationships" xmlns:p="http://schemas.openxmlformats.org/presentationml/2006/main">
-  <p:cSld name="Slide 64">
+  <p:cSld name="Slide 62">
     <p:spTree>
       <p:nvGrpSpPr>
         <p:cNvPr id="1" name=""/>
@@ -24673,7 +23853,7 @@
       </p:sp>
       <p:graphicFrame>
         <p:nvGraphicFramePr>
-          <p:cNvPr id="65" name="Table 0"/>
+          <p:cNvPr id="63" name="Table 0"/>
           <p:cNvGraphicFramePr>
             <a:graphicFrameLocks noGrp="1"/>
           </p:cNvGraphicFramePr>
@@ -24783,7 +23963,7 @@
                           <a:ea typeface="Calibri" pitchFamily="34" charset="-122"/>
                           <a:cs typeface="Calibri" pitchFamily="34" charset="-120"/>
                         </a:rPr>
-                        <a:t>DEFINITIONS; Before 1750 and the Industrial Revolution; The Population Explosion since 1950; Regional Trends: MEDCs and LEDCs; Factors of Regional Differences.</a:t>
+                        <a:t>DEFINITIONS; Up to the Industrial Revolution; After the Industrial Revolution to the Present; Regional Trends of Population Change; Reasons for the Differences in Rates of Change.</a:t>
                       </a:r>
                       <a:endParaRPr lang="en-US" sz="1600" dirty="0">
                         <a:latin typeface="Calibri" charset="0"/>
@@ -25433,7 +24613,7 @@
             <a:pPr algn="ctr"/>
             <a:fld id="{F7021451-1387-4CA6-816F-3879F97B5CBC}" type="slidenum">
               <a:rPr b="1" lang="en-US"/>
-              <a:t>64</a:t>
+              <a:t>62</a:t>
             </a:fld>
             <a:endParaRPr lang="en-US"/>
           </a:p>
@@ -25447,9 +24627,9 @@
 </p:sld>
 </file>
 
-<file path=ppt/slides/slide65.xml><?xml version="1.0" encoding="utf-8"?>
+<file path=ppt/slides/slide63.xml><?xml version="1.0" encoding="utf-8"?>
 <p:sld xmlns:a="http://schemas.openxmlformats.org/drawingml/2006/main" xmlns:r="http://schemas.openxmlformats.org/officeDocument/2006/relationships" xmlns:p="http://schemas.openxmlformats.org/presentationml/2006/main">
-  <p:cSld name="Slide 65">
+  <p:cSld name="Slide 63">
     <p:spTree>
       <p:nvGrpSpPr>
         <p:cNvPr id="1" name=""/>
@@ -25758,7 +24938,7 @@
             <a:pPr algn="ctr"/>
             <a:fld id="{F7021451-1387-4CA6-816F-3879F97B5CBC}" type="slidenum">
               <a:rPr b="1" lang="en-US"/>
-              <a:t>65</a:t>
+              <a:t>63</a:t>
             </a:fld>
             <a:endParaRPr lang="en-US"/>
           </a:p>
@@ -25772,9 +24952,9 @@
 </p:sld>
 </file>
 
-<file path=ppt/slides/slide66.xml><?xml version="1.0" encoding="utf-8"?>
+<file path=ppt/slides/slide64.xml><?xml version="1.0" encoding="utf-8"?>
 <p:sld xmlns:a="http://schemas.openxmlformats.org/drawingml/2006/main" xmlns:r="http://schemas.openxmlformats.org/officeDocument/2006/relationships" xmlns:p="http://schemas.openxmlformats.org/presentationml/2006/main">
-  <p:cSld name="Slide 66">
+  <p:cSld name="Slide 64">
     <p:spTree>
       <p:nvGrpSpPr>
         <p:cNvPr id="1" name=""/>
@@ -26083,7 +25263,7 @@
             <a:pPr algn="ctr"/>
             <a:fld id="{F7021451-1387-4CA6-816F-3879F97B5CBC}" type="slidenum">
               <a:rPr b="1" lang="en-US"/>
-              <a:t>66</a:t>
+              <a:t>64</a:t>
             </a:fld>
             <a:endParaRPr lang="en-US"/>
           </a:p>
